--- a/intel_IP/IRIS/doc/軸向說明.pptx
+++ b/intel_IP/IRIS/doc/軸向說明.pptx
@@ -7,9 +7,12 @@
   <p:sldIdLst>
     <p:sldId id="256" r:id="rId2"/>
     <p:sldId id="257" r:id="rId3"/>
-    <p:sldId id="258" r:id="rId4"/>
-    <p:sldId id="259" r:id="rId5"/>
-    <p:sldId id="260" r:id="rId6"/>
+    <p:sldId id="273" r:id="rId4"/>
+    <p:sldId id="279" r:id="rId5"/>
+    <p:sldId id="258" r:id="rId6"/>
+    <p:sldId id="259" r:id="rId7"/>
+    <p:sldId id="260" r:id="rId8"/>
+    <p:sldId id="261" r:id="rId9"/>
   </p:sldIdLst>
   <p:sldSz cx="12192000" cy="6858000"/>
   <p:notesSz cx="6858000" cy="9144000"/>
@@ -263,7 +266,7 @@
           <a:p>
             <a:fld id="{C6DC6E88-8268-41DF-AB70-3C6FB3488E03}" type="datetimeFigureOut">
               <a:rPr lang="zh-TW" altLang="en-US" smtClean="0"/>
-              <a:t>2025/10/9</a:t>
+              <a:t>2026/4/22</a:t>
             </a:fld>
             <a:endParaRPr lang="zh-TW" altLang="en-US"/>
           </a:p>
@@ -461,7 +464,7 @@
           <a:p>
             <a:fld id="{C6DC6E88-8268-41DF-AB70-3C6FB3488E03}" type="datetimeFigureOut">
               <a:rPr lang="zh-TW" altLang="en-US" smtClean="0"/>
-              <a:t>2025/10/9</a:t>
+              <a:t>2026/4/22</a:t>
             </a:fld>
             <a:endParaRPr lang="zh-TW" altLang="en-US"/>
           </a:p>
@@ -669,7 +672,7 @@
           <a:p>
             <a:fld id="{C6DC6E88-8268-41DF-AB70-3C6FB3488E03}" type="datetimeFigureOut">
               <a:rPr lang="zh-TW" altLang="en-US" smtClean="0"/>
-              <a:t>2025/10/9</a:t>
+              <a:t>2026/4/22</a:t>
             </a:fld>
             <a:endParaRPr lang="zh-TW" altLang="en-US"/>
           </a:p>
@@ -867,7 +870,7 @@
           <a:p>
             <a:fld id="{C6DC6E88-8268-41DF-AB70-3C6FB3488E03}" type="datetimeFigureOut">
               <a:rPr lang="zh-TW" altLang="en-US" smtClean="0"/>
-              <a:t>2025/10/9</a:t>
+              <a:t>2026/4/22</a:t>
             </a:fld>
             <a:endParaRPr lang="zh-TW" altLang="en-US"/>
           </a:p>
@@ -1142,7 +1145,7 @@
           <a:p>
             <a:fld id="{C6DC6E88-8268-41DF-AB70-3C6FB3488E03}" type="datetimeFigureOut">
               <a:rPr lang="zh-TW" altLang="en-US" smtClean="0"/>
-              <a:t>2025/10/9</a:t>
+              <a:t>2026/4/22</a:t>
             </a:fld>
             <a:endParaRPr lang="zh-TW" altLang="en-US"/>
           </a:p>
@@ -1407,7 +1410,7 @@
           <a:p>
             <a:fld id="{C6DC6E88-8268-41DF-AB70-3C6FB3488E03}" type="datetimeFigureOut">
               <a:rPr lang="zh-TW" altLang="en-US" smtClean="0"/>
-              <a:t>2025/10/9</a:t>
+              <a:t>2026/4/22</a:t>
             </a:fld>
             <a:endParaRPr lang="zh-TW" altLang="en-US"/>
           </a:p>
@@ -1819,7 +1822,7 @@
           <a:p>
             <a:fld id="{C6DC6E88-8268-41DF-AB70-3C6FB3488E03}" type="datetimeFigureOut">
               <a:rPr lang="zh-TW" altLang="en-US" smtClean="0"/>
-              <a:t>2025/10/9</a:t>
+              <a:t>2026/4/22</a:t>
             </a:fld>
             <a:endParaRPr lang="zh-TW" altLang="en-US"/>
           </a:p>
@@ -1960,7 +1963,7 @@
           <a:p>
             <a:fld id="{C6DC6E88-8268-41DF-AB70-3C6FB3488E03}" type="datetimeFigureOut">
               <a:rPr lang="zh-TW" altLang="en-US" smtClean="0"/>
-              <a:t>2025/10/9</a:t>
+              <a:t>2026/4/22</a:t>
             </a:fld>
             <a:endParaRPr lang="zh-TW" altLang="en-US"/>
           </a:p>
@@ -2073,7 +2076,7 @@
           <a:p>
             <a:fld id="{C6DC6E88-8268-41DF-AB70-3C6FB3488E03}" type="datetimeFigureOut">
               <a:rPr lang="zh-TW" altLang="en-US" smtClean="0"/>
-              <a:t>2025/10/9</a:t>
+              <a:t>2026/4/22</a:t>
             </a:fld>
             <a:endParaRPr lang="zh-TW" altLang="en-US"/>
           </a:p>
@@ -2384,7 +2387,7 @@
           <a:p>
             <a:fld id="{C6DC6E88-8268-41DF-AB70-3C6FB3488E03}" type="datetimeFigureOut">
               <a:rPr lang="zh-TW" altLang="en-US" smtClean="0"/>
-              <a:t>2025/10/9</a:t>
+              <a:t>2026/4/22</a:t>
             </a:fld>
             <a:endParaRPr lang="zh-TW" altLang="en-US"/>
           </a:p>
@@ -2672,7 +2675,7 @@
           <a:p>
             <a:fld id="{C6DC6E88-8268-41DF-AB70-3C6FB3488E03}" type="datetimeFigureOut">
               <a:rPr lang="zh-TW" altLang="en-US" smtClean="0"/>
-              <a:t>2025/10/9</a:t>
+              <a:t>2026/4/22</a:t>
             </a:fld>
             <a:endParaRPr lang="zh-TW" altLang="en-US"/>
           </a:p>
@@ -2913,7 +2916,7 @@
           <a:p>
             <a:fld id="{C6DC6E88-8268-41DF-AB70-3C6FB3488E03}" type="datetimeFigureOut">
               <a:rPr lang="zh-TW" altLang="en-US" smtClean="0"/>
-              <a:t>2025/10/9</a:t>
+              <a:t>2026/4/22</a:t>
             </a:fld>
             <a:endParaRPr lang="zh-TW" altLang="en-US"/>
           </a:p>
@@ -4316,6 +4319,1485 @@
   <p:cSld>
     <p:spTree>
       <p:nvGrpSpPr>
+        <p:cNvPr id="1" name=""/>
+        <p:cNvGrpSpPr/>
+        <p:nvPr/>
+      </p:nvGrpSpPr>
+      <p:grpSpPr>
+        <a:xfrm>
+          <a:off x="0" y="0"/>
+          <a:ext cx="0" cy="0"/>
+          <a:chOff x="0" y="0"/>
+          <a:chExt cx="0" cy="0"/>
+        </a:xfrm>
+      </p:grpSpPr>
+      <p:pic>
+        <p:nvPicPr>
+          <p:cNvPr id="4" name="圖片 3">
+            <a:extLst>
+              <a:ext uri="{FF2B5EF4-FFF2-40B4-BE49-F238E27FC236}">
+                <a16:creationId xmlns:a16="http://schemas.microsoft.com/office/drawing/2014/main" id="{F4D93D1A-6A3F-D419-9E28-5C817C96D816}"/>
+              </a:ext>
+            </a:extLst>
+          </p:cNvPr>
+          <p:cNvPicPr>
+            <a:picLocks noChangeAspect="1"/>
+          </p:cNvPicPr>
+          <p:nvPr/>
+        </p:nvPicPr>
+        <p:blipFill>
+          <a:blip r:embed="rId2"/>
+          <a:stretch>
+            <a:fillRect/>
+          </a:stretch>
+        </p:blipFill>
+        <p:spPr>
+          <a:xfrm>
+            <a:off x="7546592" y="2150814"/>
+            <a:ext cx="3313832" cy="4417446"/>
+          </a:xfrm>
+          <a:prstGeom prst="rect">
+            <a:avLst/>
+          </a:prstGeom>
+        </p:spPr>
+      </p:pic>
+      <p:sp>
+        <p:nvSpPr>
+          <p:cNvPr id="5" name="文字方塊 4">
+            <a:extLst>
+              <a:ext uri="{FF2B5EF4-FFF2-40B4-BE49-F238E27FC236}">
+                <a16:creationId xmlns:a16="http://schemas.microsoft.com/office/drawing/2014/main" id="{4D0DBC49-0902-BF01-0124-F6F81BD72880}"/>
+              </a:ext>
+            </a:extLst>
+          </p:cNvPr>
+          <p:cNvSpPr txBox="1"/>
+          <p:nvPr/>
+        </p:nvSpPr>
+        <p:spPr>
+          <a:xfrm>
+            <a:off x="8568912" y="5917732"/>
+            <a:ext cx="1923283" cy="369332"/>
+          </a:xfrm>
+          <a:prstGeom prst="rect">
+            <a:avLst/>
+          </a:prstGeom>
+          <a:solidFill>
+            <a:srgbClr val="FFFF00"/>
+          </a:solidFill>
+        </p:spPr>
+        <p:txBody>
+          <a:bodyPr wrap="none" rtlCol="0">
+            <a:spAutoFit/>
+          </a:bodyPr>
+          <a:lstStyle/>
+          <a:p>
+            <a:r>
+              <a:rPr lang="en-US" altLang="zh-TW" dirty="0"/>
+              <a:t>Port1, PD1, z-axis</a:t>
+            </a:r>
+            <a:endParaRPr lang="zh-TW" altLang="en-US" dirty="0"/>
+          </a:p>
+        </p:txBody>
+      </p:sp>
+      <p:sp>
+        <p:nvSpPr>
+          <p:cNvPr id="6" name="文字方塊 5">
+            <a:extLst>
+              <a:ext uri="{FF2B5EF4-FFF2-40B4-BE49-F238E27FC236}">
+                <a16:creationId xmlns:a16="http://schemas.microsoft.com/office/drawing/2014/main" id="{29369663-993C-4A46-13B8-45DF85CB67D0}"/>
+              </a:ext>
+            </a:extLst>
+          </p:cNvPr>
+          <p:cNvSpPr txBox="1"/>
+          <p:nvPr/>
+        </p:nvSpPr>
+        <p:spPr>
+          <a:xfrm>
+            <a:off x="9898782" y="2234403"/>
+            <a:ext cx="1920847" cy="369332"/>
+          </a:xfrm>
+          <a:prstGeom prst="rect">
+            <a:avLst/>
+          </a:prstGeom>
+          <a:solidFill>
+            <a:srgbClr val="FFFF00"/>
+          </a:solidFill>
+        </p:spPr>
+        <p:txBody>
+          <a:bodyPr wrap="none" rtlCol="0">
+            <a:spAutoFit/>
+          </a:bodyPr>
+          <a:lstStyle/>
+          <a:p>
+            <a:r>
+              <a:rPr lang="en-US" altLang="zh-TW" dirty="0"/>
+              <a:t>Port2, PD2, x-axis</a:t>
+            </a:r>
+            <a:endParaRPr lang="zh-TW" altLang="en-US" dirty="0"/>
+          </a:p>
+        </p:txBody>
+      </p:sp>
+      <p:sp>
+        <p:nvSpPr>
+          <p:cNvPr id="7" name="文字方塊 6">
+            <a:extLst>
+              <a:ext uri="{FF2B5EF4-FFF2-40B4-BE49-F238E27FC236}">
+                <a16:creationId xmlns:a16="http://schemas.microsoft.com/office/drawing/2014/main" id="{73BD027E-5F15-040D-003D-C8BACB9E79E2}"/>
+              </a:ext>
+            </a:extLst>
+          </p:cNvPr>
+          <p:cNvSpPr txBox="1"/>
+          <p:nvPr/>
+        </p:nvSpPr>
+        <p:spPr>
+          <a:xfrm>
+            <a:off x="5633402" y="4034273"/>
+            <a:ext cx="1926489" cy="369332"/>
+          </a:xfrm>
+          <a:prstGeom prst="rect">
+            <a:avLst/>
+          </a:prstGeom>
+          <a:solidFill>
+            <a:srgbClr val="FFFF00"/>
+          </a:solidFill>
+        </p:spPr>
+        <p:txBody>
+          <a:bodyPr wrap="none" rtlCol="0">
+            <a:spAutoFit/>
+          </a:bodyPr>
+          <a:lstStyle/>
+          <a:p>
+            <a:r>
+              <a:rPr lang="en-US" altLang="zh-TW" dirty="0"/>
+              <a:t>Port3, PD3, y-axis</a:t>
+            </a:r>
+            <a:endParaRPr lang="zh-TW" altLang="en-US" dirty="0"/>
+          </a:p>
+        </p:txBody>
+      </p:sp>
+      <p:sp>
+        <p:nvSpPr>
+          <p:cNvPr id="9" name="文字方塊 8">
+            <a:extLst>
+              <a:ext uri="{FF2B5EF4-FFF2-40B4-BE49-F238E27FC236}">
+                <a16:creationId xmlns:a16="http://schemas.microsoft.com/office/drawing/2014/main" id="{876612A8-AB2B-0445-6DBF-811A099BF102}"/>
+              </a:ext>
+            </a:extLst>
+          </p:cNvPr>
+          <p:cNvSpPr txBox="1"/>
+          <p:nvPr/>
+        </p:nvSpPr>
+        <p:spPr>
+          <a:xfrm>
+            <a:off x="282040" y="252879"/>
+            <a:ext cx="6097978" cy="923330"/>
+          </a:xfrm>
+          <a:prstGeom prst="rect">
+            <a:avLst/>
+          </a:prstGeom>
+          <a:noFill/>
+        </p:spPr>
+        <p:txBody>
+          <a:bodyPr wrap="square">
+            <a:spAutoFit/>
+          </a:bodyPr>
+          <a:lstStyle/>
+          <a:p>
+            <a:pPr marL="742950" lvl="1" indent="-285750">
+              <a:buFont typeface="Arial" panose="020B0604020202020204" pitchFamily="34" charset="0"/>
+              <a:buChar char="•"/>
+            </a:pPr>
+            <a:r>
+              <a:rPr lang="en-US" altLang="zh-TW" sz="1800" dirty="0">
+                <a:solidFill>
+                  <a:srgbClr val="FF0000"/>
+                </a:solidFill>
+                <a:latin typeface="微軟正黑體" panose="020B0604030504040204" pitchFamily="34" charset="-120"/>
+                <a:ea typeface="微軟正黑體" panose="020B0604030504040204" pitchFamily="34" charset="-120"/>
+              </a:rPr>
+              <a:t>PD1</a:t>
+            </a:r>
+            <a:r>
+              <a:rPr lang="zh-TW" altLang="en-US" sz="1800" dirty="0">
+                <a:latin typeface="微軟正黑體" panose="020B0604030504040204" pitchFamily="34" charset="-120"/>
+                <a:ea typeface="微軟正黑體" panose="020B0604030504040204" pitchFamily="34" charset="-120"/>
+              </a:rPr>
+              <a:t> </a:t>
+            </a:r>
+            <a:r>
+              <a:rPr lang="en-US" altLang="zh-TW" sz="1800" dirty="0">
+                <a:latin typeface="微軟正黑體" panose="020B0604030504040204" pitchFamily="34" charset="-120"/>
+                <a:ea typeface="微軟正黑體" panose="020B0604030504040204" pitchFamily="34" charset="-120"/>
+              </a:rPr>
+              <a:t>&gt;</a:t>
+            </a:r>
+            <a:r>
+              <a:rPr lang="zh-TW" altLang="en-US" sz="1800" dirty="0">
+                <a:latin typeface="微軟正黑體" panose="020B0604030504040204" pitchFamily="34" charset="-120"/>
+                <a:ea typeface="微軟正黑體" panose="020B0604030504040204" pitchFamily="34" charset="-120"/>
+              </a:rPr>
+              <a:t> </a:t>
+            </a:r>
+            <a:r>
+              <a:rPr lang="en-US" altLang="zh-TW" sz="1800" dirty="0">
+                <a:latin typeface="微軟正黑體" panose="020B0604030504040204" pitchFamily="34" charset="-120"/>
+                <a:ea typeface="微軟正黑體" panose="020B0604030504040204" pitchFamily="34" charset="-120"/>
+              </a:rPr>
+              <a:t>DAC1</a:t>
+            </a:r>
+            <a:r>
+              <a:rPr lang="zh-TW" altLang="en-US" sz="1800" dirty="0">
+                <a:latin typeface="微軟正黑體" panose="020B0604030504040204" pitchFamily="34" charset="-120"/>
+                <a:ea typeface="微軟正黑體" panose="020B0604030504040204" pitchFamily="34" charset="-120"/>
+              </a:rPr>
+              <a:t> </a:t>
+            </a:r>
+            <a:r>
+              <a:rPr lang="en-US" altLang="zh-TW" sz="1800" dirty="0">
+                <a:latin typeface="微軟正黑體" panose="020B0604030504040204" pitchFamily="34" charset="-120"/>
+                <a:ea typeface="微軟正黑體" panose="020B0604030504040204" pitchFamily="34" charset="-120"/>
+              </a:rPr>
+              <a:t>&gt;</a:t>
+            </a:r>
+            <a:r>
+              <a:rPr lang="zh-TW" altLang="en-US" sz="1800" dirty="0">
+                <a:latin typeface="微軟正黑體" panose="020B0604030504040204" pitchFamily="34" charset="-120"/>
+                <a:ea typeface="微軟正黑體" panose="020B0604030504040204" pitchFamily="34" charset="-120"/>
+              </a:rPr>
+              <a:t> </a:t>
+            </a:r>
+            <a:r>
+              <a:rPr lang="zh-TW" altLang="en-US" sz="1800" dirty="0">
+                <a:solidFill>
+                  <a:srgbClr val="FF0000"/>
+                </a:solidFill>
+                <a:latin typeface="微軟正黑體" panose="020B0604030504040204" pitchFamily="34" charset="-120"/>
+                <a:ea typeface="微軟正黑體" panose="020B0604030504040204" pitchFamily="34" charset="-120"/>
+              </a:rPr>
+              <a:t>實際</a:t>
+            </a:r>
+            <a:r>
+              <a:rPr lang="en-US" altLang="zh-TW" sz="1800" dirty="0">
+                <a:solidFill>
+                  <a:srgbClr val="FF0000"/>
+                </a:solidFill>
+                <a:latin typeface="微軟正黑體" panose="020B0604030504040204" pitchFamily="34" charset="-120"/>
+                <a:ea typeface="微軟正黑體" panose="020B0604030504040204" pitchFamily="34" charset="-120"/>
+              </a:rPr>
+              <a:t>z</a:t>
+            </a:r>
+            <a:r>
+              <a:rPr lang="zh-TW" altLang="en-US" sz="1800" dirty="0">
+                <a:solidFill>
+                  <a:srgbClr val="FF0000"/>
+                </a:solidFill>
+                <a:latin typeface="微軟正黑體" panose="020B0604030504040204" pitchFamily="34" charset="-120"/>
+                <a:ea typeface="微軟正黑體" panose="020B0604030504040204" pitchFamily="34" charset="-120"/>
+              </a:rPr>
+              <a:t>軸</a:t>
+            </a:r>
+            <a:r>
+              <a:rPr lang="en-US" altLang="zh-TW" sz="1800" dirty="0">
+                <a:latin typeface="微軟正黑體" panose="020B0604030504040204" pitchFamily="34" charset="-120"/>
+                <a:ea typeface="微軟正黑體" panose="020B0604030504040204" pitchFamily="34" charset="-120"/>
+              </a:rPr>
+              <a:t>(GUI</a:t>
+            </a:r>
+            <a:r>
+              <a:rPr lang="zh-TW" altLang="en-US" sz="1800" dirty="0">
+                <a:latin typeface="微軟正黑體" panose="020B0604030504040204" pitchFamily="34" charset="-120"/>
+                <a:ea typeface="微軟正黑體" panose="020B0604030504040204" pitchFamily="34" charset="-120"/>
+              </a:rPr>
+              <a:t>目前為</a:t>
+            </a:r>
+            <a:r>
+              <a:rPr lang="en-US" altLang="zh-TW" sz="1800" dirty="0">
+                <a:latin typeface="微軟正黑體" panose="020B0604030504040204" pitchFamily="34" charset="-120"/>
+                <a:ea typeface="微軟正黑體" panose="020B0604030504040204" pitchFamily="34" charset="-120"/>
+              </a:rPr>
+              <a:t>x</a:t>
+            </a:r>
+            <a:r>
+              <a:rPr lang="zh-TW" altLang="en-US" sz="1800" dirty="0">
+                <a:latin typeface="微軟正黑體" panose="020B0604030504040204" pitchFamily="34" charset="-120"/>
+                <a:ea typeface="微軟正黑體" panose="020B0604030504040204" pitchFamily="34" charset="-120"/>
+              </a:rPr>
+              <a:t>軸</a:t>
+            </a:r>
+            <a:r>
+              <a:rPr lang="en-US" altLang="zh-TW" sz="1800" dirty="0">
+                <a:latin typeface="微軟正黑體" panose="020B0604030504040204" pitchFamily="34" charset="-120"/>
+                <a:ea typeface="微軟正黑體" panose="020B0604030504040204" pitchFamily="34" charset="-120"/>
+              </a:rPr>
+              <a:t>)</a:t>
+            </a:r>
+          </a:p>
+          <a:p>
+            <a:pPr marL="742950" lvl="1" indent="-285750">
+              <a:buFont typeface="Arial" panose="020B0604020202020204" pitchFamily="34" charset="0"/>
+              <a:buChar char="•"/>
+            </a:pPr>
+            <a:r>
+              <a:rPr lang="en-US" altLang="zh-TW" sz="1800" dirty="0">
+                <a:solidFill>
+                  <a:srgbClr val="FF0000"/>
+                </a:solidFill>
+                <a:latin typeface="微軟正黑體" panose="020B0604030504040204" pitchFamily="34" charset="-120"/>
+                <a:ea typeface="微軟正黑體" panose="020B0604030504040204" pitchFamily="34" charset="-120"/>
+              </a:rPr>
+              <a:t>PD2</a:t>
+            </a:r>
+            <a:r>
+              <a:rPr lang="zh-TW" altLang="en-US" sz="1800" dirty="0">
+                <a:latin typeface="微軟正黑體" panose="020B0604030504040204" pitchFamily="34" charset="-120"/>
+                <a:ea typeface="微軟正黑體" panose="020B0604030504040204" pitchFamily="34" charset="-120"/>
+              </a:rPr>
+              <a:t> </a:t>
+            </a:r>
+            <a:r>
+              <a:rPr lang="en-US" altLang="zh-TW" sz="1800" dirty="0">
+                <a:latin typeface="微軟正黑體" panose="020B0604030504040204" pitchFamily="34" charset="-120"/>
+                <a:ea typeface="微軟正黑體" panose="020B0604030504040204" pitchFamily="34" charset="-120"/>
+              </a:rPr>
+              <a:t>&gt;</a:t>
+            </a:r>
+            <a:r>
+              <a:rPr lang="zh-TW" altLang="en-US" sz="1800" dirty="0">
+                <a:latin typeface="微軟正黑體" panose="020B0604030504040204" pitchFamily="34" charset="-120"/>
+                <a:ea typeface="微軟正黑體" panose="020B0604030504040204" pitchFamily="34" charset="-120"/>
+              </a:rPr>
+              <a:t> </a:t>
+            </a:r>
+            <a:r>
+              <a:rPr lang="en-US" altLang="zh-TW" sz="1800" dirty="0">
+                <a:latin typeface="微軟正黑體" panose="020B0604030504040204" pitchFamily="34" charset="-120"/>
+                <a:ea typeface="微軟正黑體" panose="020B0604030504040204" pitchFamily="34" charset="-120"/>
+              </a:rPr>
+              <a:t>DAC3</a:t>
+            </a:r>
+            <a:r>
+              <a:rPr lang="zh-TW" altLang="en-US" sz="1800" dirty="0">
+                <a:latin typeface="微軟正黑體" panose="020B0604030504040204" pitchFamily="34" charset="-120"/>
+                <a:ea typeface="微軟正黑體" panose="020B0604030504040204" pitchFamily="34" charset="-120"/>
+              </a:rPr>
+              <a:t> </a:t>
+            </a:r>
+            <a:r>
+              <a:rPr lang="en-US" altLang="zh-TW" sz="1800" dirty="0">
+                <a:latin typeface="微軟正黑體" panose="020B0604030504040204" pitchFamily="34" charset="-120"/>
+                <a:ea typeface="微軟正黑體" panose="020B0604030504040204" pitchFamily="34" charset="-120"/>
+              </a:rPr>
+              <a:t>&gt;</a:t>
+            </a:r>
+            <a:r>
+              <a:rPr lang="zh-TW" altLang="en-US" sz="1800" dirty="0">
+                <a:latin typeface="微軟正黑體" panose="020B0604030504040204" pitchFamily="34" charset="-120"/>
+                <a:ea typeface="微軟正黑體" panose="020B0604030504040204" pitchFamily="34" charset="-120"/>
+              </a:rPr>
+              <a:t> </a:t>
+            </a:r>
+            <a:r>
+              <a:rPr lang="zh-TW" altLang="en-US" sz="1800" dirty="0">
+                <a:solidFill>
+                  <a:srgbClr val="FF0000"/>
+                </a:solidFill>
+                <a:latin typeface="微軟正黑體" panose="020B0604030504040204" pitchFamily="34" charset="-120"/>
+                <a:ea typeface="微軟正黑體" panose="020B0604030504040204" pitchFamily="34" charset="-120"/>
+              </a:rPr>
+              <a:t>實際</a:t>
+            </a:r>
+            <a:r>
+              <a:rPr lang="en-US" altLang="zh-TW" sz="1800" dirty="0">
+                <a:solidFill>
+                  <a:srgbClr val="FF0000"/>
+                </a:solidFill>
+                <a:latin typeface="微軟正黑體" panose="020B0604030504040204" pitchFamily="34" charset="-120"/>
+                <a:ea typeface="微軟正黑體" panose="020B0604030504040204" pitchFamily="34" charset="-120"/>
+              </a:rPr>
+              <a:t>x</a:t>
+            </a:r>
+            <a:r>
+              <a:rPr lang="zh-TW" altLang="en-US" sz="1800" dirty="0">
+                <a:solidFill>
+                  <a:srgbClr val="FF0000"/>
+                </a:solidFill>
+                <a:latin typeface="微軟正黑體" panose="020B0604030504040204" pitchFamily="34" charset="-120"/>
+                <a:ea typeface="微軟正黑體" panose="020B0604030504040204" pitchFamily="34" charset="-120"/>
+              </a:rPr>
+              <a:t>軸</a:t>
+            </a:r>
+            <a:r>
+              <a:rPr lang="en-US" altLang="zh-TW" sz="1800" dirty="0">
+                <a:latin typeface="微軟正黑體" panose="020B0604030504040204" pitchFamily="34" charset="-120"/>
+                <a:ea typeface="微軟正黑體" panose="020B0604030504040204" pitchFamily="34" charset="-120"/>
+              </a:rPr>
+              <a:t>(GUI</a:t>
+            </a:r>
+            <a:r>
+              <a:rPr lang="zh-TW" altLang="en-US" sz="1800" dirty="0">
+                <a:latin typeface="微軟正黑體" panose="020B0604030504040204" pitchFamily="34" charset="-120"/>
+                <a:ea typeface="微軟正黑體" panose="020B0604030504040204" pitchFamily="34" charset="-120"/>
+              </a:rPr>
+              <a:t>目前為</a:t>
+            </a:r>
+            <a:r>
+              <a:rPr lang="en-US" altLang="zh-TW" sz="1800" dirty="0">
+                <a:latin typeface="微軟正黑體" panose="020B0604030504040204" pitchFamily="34" charset="-120"/>
+                <a:ea typeface="微軟正黑體" panose="020B0604030504040204" pitchFamily="34" charset="-120"/>
+              </a:rPr>
+              <a:t>z</a:t>
+            </a:r>
+            <a:r>
+              <a:rPr lang="zh-TW" altLang="en-US" sz="1800" dirty="0">
+                <a:latin typeface="微軟正黑體" panose="020B0604030504040204" pitchFamily="34" charset="-120"/>
+                <a:ea typeface="微軟正黑體" panose="020B0604030504040204" pitchFamily="34" charset="-120"/>
+              </a:rPr>
+              <a:t>軸</a:t>
+            </a:r>
+            <a:r>
+              <a:rPr lang="en-US" altLang="zh-TW" sz="1800" dirty="0">
+                <a:latin typeface="微軟正黑體" panose="020B0604030504040204" pitchFamily="34" charset="-120"/>
+                <a:ea typeface="微軟正黑體" panose="020B0604030504040204" pitchFamily="34" charset="-120"/>
+              </a:rPr>
+              <a:t>)</a:t>
+            </a:r>
+          </a:p>
+          <a:p>
+            <a:pPr marL="742950" lvl="1" indent="-285750">
+              <a:buFont typeface="Arial" panose="020B0604020202020204" pitchFamily="34" charset="0"/>
+              <a:buChar char="•"/>
+            </a:pPr>
+            <a:r>
+              <a:rPr lang="en-US" altLang="zh-TW" sz="1800" dirty="0">
+                <a:solidFill>
+                  <a:srgbClr val="FF0000"/>
+                </a:solidFill>
+                <a:latin typeface="微軟正黑體" panose="020B0604030504040204" pitchFamily="34" charset="-120"/>
+                <a:ea typeface="微軟正黑體" panose="020B0604030504040204" pitchFamily="34" charset="-120"/>
+              </a:rPr>
+              <a:t>PD3</a:t>
+            </a:r>
+            <a:r>
+              <a:rPr lang="zh-TW" altLang="en-US" sz="1800" dirty="0">
+                <a:latin typeface="微軟正黑體" panose="020B0604030504040204" pitchFamily="34" charset="-120"/>
+                <a:ea typeface="微軟正黑體" panose="020B0604030504040204" pitchFamily="34" charset="-120"/>
+              </a:rPr>
+              <a:t> </a:t>
+            </a:r>
+            <a:r>
+              <a:rPr lang="en-US" altLang="zh-TW" sz="1800" dirty="0">
+                <a:latin typeface="微軟正黑體" panose="020B0604030504040204" pitchFamily="34" charset="-120"/>
+                <a:ea typeface="微軟正黑體" panose="020B0604030504040204" pitchFamily="34" charset="-120"/>
+              </a:rPr>
+              <a:t>&gt;</a:t>
+            </a:r>
+            <a:r>
+              <a:rPr lang="zh-TW" altLang="en-US" sz="1800" dirty="0">
+                <a:latin typeface="微軟正黑體" panose="020B0604030504040204" pitchFamily="34" charset="-120"/>
+                <a:ea typeface="微軟正黑體" panose="020B0604030504040204" pitchFamily="34" charset="-120"/>
+              </a:rPr>
+              <a:t> </a:t>
+            </a:r>
+            <a:r>
+              <a:rPr lang="en-US" altLang="zh-TW" sz="1800" dirty="0">
+                <a:latin typeface="微軟正黑體" panose="020B0604030504040204" pitchFamily="34" charset="-120"/>
+                <a:ea typeface="微軟正黑體" panose="020B0604030504040204" pitchFamily="34" charset="-120"/>
+              </a:rPr>
+              <a:t>DAC2</a:t>
+            </a:r>
+            <a:r>
+              <a:rPr lang="zh-TW" altLang="en-US" sz="1800" dirty="0">
+                <a:latin typeface="微軟正黑體" panose="020B0604030504040204" pitchFamily="34" charset="-120"/>
+                <a:ea typeface="微軟正黑體" panose="020B0604030504040204" pitchFamily="34" charset="-120"/>
+              </a:rPr>
+              <a:t> </a:t>
+            </a:r>
+            <a:r>
+              <a:rPr lang="en-US" altLang="zh-TW" sz="1800" dirty="0">
+                <a:latin typeface="微軟正黑體" panose="020B0604030504040204" pitchFamily="34" charset="-120"/>
+                <a:ea typeface="微軟正黑體" panose="020B0604030504040204" pitchFamily="34" charset="-120"/>
+              </a:rPr>
+              <a:t>&gt;</a:t>
+            </a:r>
+            <a:r>
+              <a:rPr lang="zh-TW" altLang="en-US" sz="1800" dirty="0">
+                <a:latin typeface="微軟正黑體" panose="020B0604030504040204" pitchFamily="34" charset="-120"/>
+                <a:ea typeface="微軟正黑體" panose="020B0604030504040204" pitchFamily="34" charset="-120"/>
+              </a:rPr>
+              <a:t> </a:t>
+            </a:r>
+            <a:r>
+              <a:rPr lang="zh-TW" altLang="en-US" sz="1800" dirty="0">
+                <a:solidFill>
+                  <a:srgbClr val="FF0000"/>
+                </a:solidFill>
+                <a:latin typeface="微軟正黑體" panose="020B0604030504040204" pitchFamily="34" charset="-120"/>
+                <a:ea typeface="微軟正黑體" panose="020B0604030504040204" pitchFamily="34" charset="-120"/>
+              </a:rPr>
+              <a:t>實際</a:t>
+            </a:r>
+            <a:r>
+              <a:rPr lang="en-US" altLang="zh-TW" sz="1800" dirty="0">
+                <a:solidFill>
+                  <a:srgbClr val="FF0000"/>
+                </a:solidFill>
+                <a:latin typeface="微軟正黑體" panose="020B0604030504040204" pitchFamily="34" charset="-120"/>
+                <a:ea typeface="微軟正黑體" panose="020B0604030504040204" pitchFamily="34" charset="-120"/>
+              </a:rPr>
+              <a:t>y</a:t>
+            </a:r>
+            <a:r>
+              <a:rPr lang="zh-TW" altLang="en-US" sz="1800" dirty="0">
+                <a:solidFill>
+                  <a:srgbClr val="FF0000"/>
+                </a:solidFill>
+                <a:latin typeface="微軟正黑體" panose="020B0604030504040204" pitchFamily="34" charset="-120"/>
+                <a:ea typeface="微軟正黑體" panose="020B0604030504040204" pitchFamily="34" charset="-120"/>
+              </a:rPr>
+              <a:t>軸</a:t>
+            </a:r>
+            <a:r>
+              <a:rPr lang="en-US" altLang="zh-TW" sz="1800" dirty="0">
+                <a:latin typeface="微軟正黑體" panose="020B0604030504040204" pitchFamily="34" charset="-120"/>
+                <a:ea typeface="微軟正黑體" panose="020B0604030504040204" pitchFamily="34" charset="-120"/>
+              </a:rPr>
+              <a:t>(GUI</a:t>
+            </a:r>
+            <a:r>
+              <a:rPr lang="zh-TW" altLang="en-US" sz="1800" dirty="0">
+                <a:latin typeface="微軟正黑體" panose="020B0604030504040204" pitchFamily="34" charset="-120"/>
+                <a:ea typeface="微軟正黑體" panose="020B0604030504040204" pitchFamily="34" charset="-120"/>
+              </a:rPr>
+              <a:t>目前為</a:t>
+            </a:r>
+            <a:r>
+              <a:rPr lang="en-US" altLang="zh-TW" sz="1800" dirty="0">
+                <a:latin typeface="微軟正黑體" panose="020B0604030504040204" pitchFamily="34" charset="-120"/>
+                <a:ea typeface="微軟正黑體" panose="020B0604030504040204" pitchFamily="34" charset="-120"/>
+              </a:rPr>
+              <a:t>y</a:t>
+            </a:r>
+            <a:r>
+              <a:rPr lang="zh-TW" altLang="en-US" sz="1800" dirty="0">
+                <a:latin typeface="微軟正黑體" panose="020B0604030504040204" pitchFamily="34" charset="-120"/>
+                <a:ea typeface="微軟正黑體" panose="020B0604030504040204" pitchFamily="34" charset="-120"/>
+              </a:rPr>
+              <a:t>軸</a:t>
+            </a:r>
+            <a:r>
+              <a:rPr lang="en-US" altLang="zh-TW" sz="1800" dirty="0">
+                <a:latin typeface="微軟正黑體" panose="020B0604030504040204" pitchFamily="34" charset="-120"/>
+                <a:ea typeface="微軟正黑體" panose="020B0604030504040204" pitchFamily="34" charset="-120"/>
+              </a:rPr>
+              <a:t>)</a:t>
+            </a:r>
+          </a:p>
+        </p:txBody>
+      </p:sp>
+      <p:cxnSp>
+        <p:nvCxnSpPr>
+          <p:cNvPr id="11" name="直線單箭頭接點 10">
+            <a:extLst>
+              <a:ext uri="{FF2B5EF4-FFF2-40B4-BE49-F238E27FC236}">
+                <a16:creationId xmlns:a16="http://schemas.microsoft.com/office/drawing/2014/main" id="{58C344D3-15E6-BC24-A6C2-0FB171BA5B70}"/>
+              </a:ext>
+            </a:extLst>
+          </p:cNvPr>
+          <p:cNvCxnSpPr>
+            <a:cxnSpLocks/>
+          </p:cNvCxnSpPr>
+          <p:nvPr/>
+        </p:nvCxnSpPr>
+        <p:spPr>
+          <a:xfrm>
+            <a:off x="10332963" y="613127"/>
+            <a:ext cx="1199408" cy="0"/>
+          </a:xfrm>
+          <a:prstGeom prst="straightConnector1">
+            <a:avLst/>
+          </a:prstGeom>
+          <a:ln>
+            <a:tailEnd type="triangle"/>
+          </a:ln>
+        </p:spPr>
+        <p:style>
+          <a:lnRef idx="2">
+            <a:schemeClr val="accent1"/>
+          </a:lnRef>
+          <a:fillRef idx="0">
+            <a:schemeClr val="accent1"/>
+          </a:fillRef>
+          <a:effectRef idx="1">
+            <a:schemeClr val="accent1"/>
+          </a:effectRef>
+          <a:fontRef idx="minor">
+            <a:schemeClr val="tx1"/>
+          </a:fontRef>
+        </p:style>
+      </p:cxnSp>
+      <p:cxnSp>
+        <p:nvCxnSpPr>
+          <p:cNvPr id="12" name="直線單箭頭接點 11">
+            <a:extLst>
+              <a:ext uri="{FF2B5EF4-FFF2-40B4-BE49-F238E27FC236}">
+                <a16:creationId xmlns:a16="http://schemas.microsoft.com/office/drawing/2014/main" id="{BADE9529-0980-FBA7-2F07-9A54DA70CA8C}"/>
+              </a:ext>
+            </a:extLst>
+          </p:cNvPr>
+          <p:cNvCxnSpPr>
+            <a:cxnSpLocks/>
+          </p:cNvCxnSpPr>
+          <p:nvPr/>
+        </p:nvCxnSpPr>
+        <p:spPr>
+          <a:xfrm>
+            <a:off x="10332963" y="613127"/>
+            <a:ext cx="0" cy="974606"/>
+          </a:xfrm>
+          <a:prstGeom prst="straightConnector1">
+            <a:avLst/>
+          </a:prstGeom>
+          <a:ln>
+            <a:tailEnd type="triangle"/>
+          </a:ln>
+        </p:spPr>
+        <p:style>
+          <a:lnRef idx="2">
+            <a:schemeClr val="accent1"/>
+          </a:lnRef>
+          <a:fillRef idx="0">
+            <a:schemeClr val="accent1"/>
+          </a:fillRef>
+          <a:effectRef idx="1">
+            <a:schemeClr val="accent1"/>
+          </a:effectRef>
+          <a:fontRef idx="minor">
+            <a:schemeClr val="tx1"/>
+          </a:fontRef>
+        </p:style>
+      </p:cxnSp>
+      <p:sp>
+        <p:nvSpPr>
+          <p:cNvPr id="15" name="橢圓 14">
+            <a:extLst>
+              <a:ext uri="{FF2B5EF4-FFF2-40B4-BE49-F238E27FC236}">
+                <a16:creationId xmlns:a16="http://schemas.microsoft.com/office/drawing/2014/main" id="{FA1924A5-9390-A6DC-4D8B-6426255B0A54}"/>
+              </a:ext>
+            </a:extLst>
+          </p:cNvPr>
+          <p:cNvSpPr/>
+          <p:nvPr/>
+        </p:nvSpPr>
+        <p:spPr>
+          <a:xfrm>
+            <a:off x="10237960" y="506248"/>
+            <a:ext cx="213755" cy="213755"/>
+          </a:xfrm>
+          <a:prstGeom prst="ellipse">
+            <a:avLst/>
+          </a:prstGeom>
+        </p:spPr>
+        <p:style>
+          <a:lnRef idx="2">
+            <a:schemeClr val="accent1">
+              <a:shade val="15000"/>
+            </a:schemeClr>
+          </a:lnRef>
+          <a:fillRef idx="1">
+            <a:schemeClr val="accent1"/>
+          </a:fillRef>
+          <a:effectRef idx="0">
+            <a:schemeClr val="accent1"/>
+          </a:effectRef>
+          <a:fontRef idx="minor">
+            <a:schemeClr val="lt1"/>
+          </a:fontRef>
+        </p:style>
+        <p:txBody>
+          <a:bodyPr rtlCol="0" anchor="ctr"/>
+          <a:lstStyle/>
+          <a:p>
+            <a:pPr algn="ctr"/>
+            <a:endParaRPr lang="zh-TW" altLang="en-US"/>
+          </a:p>
+        </p:txBody>
+      </p:sp>
+      <p:sp>
+        <p:nvSpPr>
+          <p:cNvPr id="16" name="文字方塊 15">
+            <a:extLst>
+              <a:ext uri="{FF2B5EF4-FFF2-40B4-BE49-F238E27FC236}">
+                <a16:creationId xmlns:a16="http://schemas.microsoft.com/office/drawing/2014/main" id="{0743F2AC-E894-89A9-9915-15058E568FE2}"/>
+              </a:ext>
+            </a:extLst>
+          </p:cNvPr>
+          <p:cNvSpPr txBox="1"/>
+          <p:nvPr/>
+        </p:nvSpPr>
+        <p:spPr>
+          <a:xfrm>
+            <a:off x="10190135" y="83477"/>
+            <a:ext cx="285656" cy="369332"/>
+          </a:xfrm>
+          <a:prstGeom prst="rect">
+            <a:avLst/>
+          </a:prstGeom>
+          <a:noFill/>
+        </p:spPr>
+        <p:txBody>
+          <a:bodyPr wrap="none" rtlCol="0">
+            <a:spAutoFit/>
+          </a:bodyPr>
+          <a:lstStyle/>
+          <a:p>
+            <a:r>
+              <a:rPr lang="en-US" altLang="zh-TW" dirty="0"/>
+              <a:t>z</a:t>
+            </a:r>
+            <a:endParaRPr lang="zh-TW" altLang="en-US" dirty="0"/>
+          </a:p>
+        </p:txBody>
+      </p:sp>
+      <p:sp>
+        <p:nvSpPr>
+          <p:cNvPr id="17" name="文字方塊 16">
+            <a:extLst>
+              <a:ext uri="{FF2B5EF4-FFF2-40B4-BE49-F238E27FC236}">
+                <a16:creationId xmlns:a16="http://schemas.microsoft.com/office/drawing/2014/main" id="{B9D83B0C-61A7-2F06-5BDB-515E8E318728}"/>
+              </a:ext>
+            </a:extLst>
+          </p:cNvPr>
+          <p:cNvSpPr txBox="1"/>
+          <p:nvPr/>
+        </p:nvSpPr>
+        <p:spPr>
+          <a:xfrm>
+            <a:off x="10190135" y="1587733"/>
+            <a:ext cx="287258" cy="369332"/>
+          </a:xfrm>
+          <a:prstGeom prst="rect">
+            <a:avLst/>
+          </a:prstGeom>
+          <a:noFill/>
+        </p:spPr>
+        <p:txBody>
+          <a:bodyPr wrap="none" rtlCol="0">
+            <a:spAutoFit/>
+          </a:bodyPr>
+          <a:lstStyle/>
+          <a:p>
+            <a:r>
+              <a:rPr lang="en-US" altLang="zh-TW" dirty="0"/>
+              <a:t>x</a:t>
+            </a:r>
+            <a:endParaRPr lang="zh-TW" altLang="en-US" dirty="0"/>
+          </a:p>
+        </p:txBody>
+      </p:sp>
+      <p:sp>
+        <p:nvSpPr>
+          <p:cNvPr id="18" name="文字方塊 17">
+            <a:extLst>
+              <a:ext uri="{FF2B5EF4-FFF2-40B4-BE49-F238E27FC236}">
+                <a16:creationId xmlns:a16="http://schemas.microsoft.com/office/drawing/2014/main" id="{8038A090-E923-20AE-0EDE-52790F551B1E}"/>
+              </a:ext>
+            </a:extLst>
+          </p:cNvPr>
+          <p:cNvSpPr txBox="1"/>
+          <p:nvPr/>
+        </p:nvSpPr>
+        <p:spPr>
+          <a:xfrm>
+            <a:off x="11532371" y="428459"/>
+            <a:ext cx="287258" cy="369332"/>
+          </a:xfrm>
+          <a:prstGeom prst="rect">
+            <a:avLst/>
+          </a:prstGeom>
+          <a:noFill/>
+        </p:spPr>
+        <p:txBody>
+          <a:bodyPr wrap="none" rtlCol="0">
+            <a:spAutoFit/>
+          </a:bodyPr>
+          <a:lstStyle/>
+          <a:p>
+            <a:r>
+              <a:rPr lang="en-US" altLang="zh-TW" dirty="0"/>
+              <a:t>y</a:t>
+            </a:r>
+            <a:endParaRPr lang="zh-TW" altLang="en-US" dirty="0"/>
+          </a:p>
+        </p:txBody>
+      </p:sp>
+      <p:pic>
+        <p:nvPicPr>
+          <p:cNvPr id="2" name="圖片 1">
+            <a:extLst>
+              <a:ext uri="{FF2B5EF4-FFF2-40B4-BE49-F238E27FC236}">
+                <a16:creationId xmlns:a16="http://schemas.microsoft.com/office/drawing/2014/main" id="{91163506-5D90-D1A4-3802-24BF1F7D924C}"/>
+              </a:ext>
+            </a:extLst>
+          </p:cNvPr>
+          <p:cNvPicPr>
+            <a:picLocks noChangeAspect="1"/>
+          </p:cNvPicPr>
+          <p:nvPr/>
+        </p:nvPicPr>
+        <p:blipFill>
+          <a:blip r:embed="rId3" cstate="hqprint">
+            <a:extLst>
+              <a:ext uri="{28A0092B-C50C-407E-A947-70E740481C1C}">
+                <a14:useLocalDpi xmlns:a14="http://schemas.microsoft.com/office/drawing/2010/main"/>
+              </a:ext>
+            </a:extLst>
+          </a:blip>
+          <a:srcRect/>
+          <a:stretch>
+            <a:fillRect/>
+          </a:stretch>
+        </p:blipFill>
+        <p:spPr>
+          <a:xfrm rot="16200000">
+            <a:off x="1733137" y="2926836"/>
+            <a:ext cx="3644954" cy="3711615"/>
+          </a:xfrm>
+          <a:prstGeom prst="rect">
+            <a:avLst/>
+          </a:prstGeom>
+        </p:spPr>
+      </p:pic>
+      <p:graphicFrame>
+        <p:nvGraphicFramePr>
+          <p:cNvPr id="3" name="表格 2">
+            <a:extLst>
+              <a:ext uri="{FF2B5EF4-FFF2-40B4-BE49-F238E27FC236}">
+                <a16:creationId xmlns:a16="http://schemas.microsoft.com/office/drawing/2014/main" id="{48268CF1-FE12-0520-B1B9-566828A52F01}"/>
+              </a:ext>
+            </a:extLst>
+          </p:cNvPr>
+          <p:cNvGraphicFramePr>
+            <a:graphicFrameLocks noGrp="1"/>
+          </p:cNvGraphicFramePr>
+          <p:nvPr/>
+        </p:nvGraphicFramePr>
+        <p:xfrm>
+          <a:off x="1576402" y="1638200"/>
+          <a:ext cx="1773873" cy="1112520"/>
+        </p:xfrm>
+        <a:graphic>
+          <a:graphicData uri="http://schemas.openxmlformats.org/drawingml/2006/table">
+            <a:tbl>
+              <a:tblPr firstRow="1" bandRow="1">
+                <a:tableStyleId>{5940675A-B579-460E-94D1-54222C63F5DA}</a:tableStyleId>
+              </a:tblPr>
+              <a:tblGrid>
+                <a:gridCol w="640080">
+                  <a:extLst>
+                    <a:ext uri="{9D8B030D-6E8A-4147-A177-3AD203B41FA5}">
+                      <a16:colId xmlns:a16="http://schemas.microsoft.com/office/drawing/2014/main" val="1246601127"/>
+                    </a:ext>
+                  </a:extLst>
+                </a:gridCol>
+                <a:gridCol w="1133793">
+                  <a:extLst>
+                    <a:ext uri="{9D8B030D-6E8A-4147-A177-3AD203B41FA5}">
+                      <a16:colId xmlns:a16="http://schemas.microsoft.com/office/drawing/2014/main" val="3698375014"/>
+                    </a:ext>
+                  </a:extLst>
+                </a:gridCol>
+              </a:tblGrid>
+              <a:tr h="370840">
+                <a:tc>
+                  <a:txBody>
+                    <a:bodyPr/>
+                    <a:lstStyle/>
+                    <a:p>
+                      <a:r>
+                        <a:rPr lang="en-US" altLang="zh-TW" dirty="0"/>
+                        <a:t>PD1</a:t>
+                      </a:r>
+                      <a:endParaRPr lang="zh-TW" altLang="en-US" dirty="0"/>
+                    </a:p>
+                  </a:txBody>
+                  <a:tcPr/>
+                </a:tc>
+                <a:tc>
+                  <a:txBody>
+                    <a:bodyPr/>
+                    <a:lstStyle/>
+                    <a:p>
+                      <a:r>
+                        <a:rPr lang="en-US" altLang="zh-TW" dirty="0"/>
+                        <a:t>ADC_1_1</a:t>
+                      </a:r>
+                      <a:endParaRPr lang="zh-TW" altLang="en-US" dirty="0"/>
+                    </a:p>
+                  </a:txBody>
+                  <a:tcPr/>
+                </a:tc>
+                <a:extLst>
+                  <a:ext uri="{0D108BD9-81ED-4DB2-BD59-A6C34878D82A}">
+                    <a16:rowId xmlns:a16="http://schemas.microsoft.com/office/drawing/2014/main" val="285053684"/>
+                  </a:ext>
+                </a:extLst>
+              </a:tr>
+              <a:tr h="370840">
+                <a:tc>
+                  <a:txBody>
+                    <a:bodyPr/>
+                    <a:lstStyle/>
+                    <a:p>
+                      <a:pPr marL="0" marR="0" lvl="0" indent="0" algn="l" defTabSz="914400" rtl="0" eaLnBrk="1" fontAlgn="auto" latinLnBrk="0" hangingPunct="1">
+                        <a:lnSpc>
+                          <a:spcPct val="100000"/>
+                        </a:lnSpc>
+                        <a:spcBef>
+                          <a:spcPts val="0"/>
+                        </a:spcBef>
+                        <a:spcAft>
+                          <a:spcPts val="0"/>
+                        </a:spcAft>
+                        <a:buClrTx/>
+                        <a:buSzTx/>
+                        <a:buFontTx/>
+                        <a:buNone/>
+                        <a:tabLst/>
+                        <a:defRPr/>
+                      </a:pPr>
+                      <a:r>
+                        <a:rPr lang="en-US" altLang="zh-TW" dirty="0"/>
+                        <a:t>PD2</a:t>
+                      </a:r>
+                      <a:endParaRPr lang="zh-TW" altLang="en-US" dirty="0"/>
+                    </a:p>
+                  </a:txBody>
+                  <a:tcPr/>
+                </a:tc>
+                <a:tc>
+                  <a:txBody>
+                    <a:bodyPr/>
+                    <a:lstStyle/>
+                    <a:p>
+                      <a:pPr marL="0" marR="0" lvl="0" indent="0" algn="l" defTabSz="914400" rtl="0" eaLnBrk="1" fontAlgn="auto" latinLnBrk="0" hangingPunct="1">
+                        <a:lnSpc>
+                          <a:spcPct val="100000"/>
+                        </a:lnSpc>
+                        <a:spcBef>
+                          <a:spcPts val="0"/>
+                        </a:spcBef>
+                        <a:spcAft>
+                          <a:spcPts val="0"/>
+                        </a:spcAft>
+                        <a:buClrTx/>
+                        <a:buSzTx/>
+                        <a:buFontTx/>
+                        <a:buNone/>
+                        <a:tabLst/>
+                        <a:defRPr/>
+                      </a:pPr>
+                      <a:r>
+                        <a:rPr lang="en-US" altLang="zh-TW" dirty="0"/>
+                        <a:t>ADC_2_2</a:t>
+                      </a:r>
+                      <a:endParaRPr lang="zh-TW" altLang="en-US" dirty="0"/>
+                    </a:p>
+                  </a:txBody>
+                  <a:tcPr/>
+                </a:tc>
+                <a:extLst>
+                  <a:ext uri="{0D108BD9-81ED-4DB2-BD59-A6C34878D82A}">
+                    <a16:rowId xmlns:a16="http://schemas.microsoft.com/office/drawing/2014/main" val="2261151463"/>
+                  </a:ext>
+                </a:extLst>
+              </a:tr>
+              <a:tr h="370840">
+                <a:tc>
+                  <a:txBody>
+                    <a:bodyPr/>
+                    <a:lstStyle/>
+                    <a:p>
+                      <a:r>
+                        <a:rPr lang="en-US" altLang="zh-TW" dirty="0"/>
+                        <a:t>PD3</a:t>
+                      </a:r>
+                      <a:endParaRPr lang="zh-TW" altLang="en-US" dirty="0"/>
+                    </a:p>
+                  </a:txBody>
+                  <a:tcPr/>
+                </a:tc>
+                <a:tc>
+                  <a:txBody>
+                    <a:bodyPr/>
+                    <a:lstStyle/>
+                    <a:p>
+                      <a:r>
+                        <a:rPr lang="en-US" altLang="zh-TW" dirty="0"/>
+                        <a:t>ADC_2_1</a:t>
+                      </a:r>
+                      <a:endParaRPr lang="zh-TW" altLang="en-US" dirty="0"/>
+                    </a:p>
+                  </a:txBody>
+                  <a:tcPr/>
+                </a:tc>
+                <a:extLst>
+                  <a:ext uri="{0D108BD9-81ED-4DB2-BD59-A6C34878D82A}">
+                    <a16:rowId xmlns:a16="http://schemas.microsoft.com/office/drawing/2014/main" val="4158035046"/>
+                  </a:ext>
+                </a:extLst>
+              </a:tr>
+            </a:tbl>
+          </a:graphicData>
+        </a:graphic>
+      </p:graphicFrame>
+      <p:graphicFrame>
+        <p:nvGraphicFramePr>
+          <p:cNvPr id="8" name="表格 7">
+            <a:extLst>
+              <a:ext uri="{FF2B5EF4-FFF2-40B4-BE49-F238E27FC236}">
+                <a16:creationId xmlns:a16="http://schemas.microsoft.com/office/drawing/2014/main" id="{28B33BE9-B350-0FE8-D45B-8469FC0317A9}"/>
+              </a:ext>
+            </a:extLst>
+          </p:cNvPr>
+          <p:cNvGraphicFramePr>
+            <a:graphicFrameLocks noGrp="1"/>
+          </p:cNvGraphicFramePr>
+          <p:nvPr/>
+        </p:nvGraphicFramePr>
+        <p:xfrm>
+          <a:off x="3602742" y="1616410"/>
+          <a:ext cx="1917510" cy="1156100"/>
+        </p:xfrm>
+        <a:graphic>
+          <a:graphicData uri="http://schemas.openxmlformats.org/drawingml/2006/table">
+            <a:tbl>
+              <a:tblPr firstRow="1" bandRow="1">
+                <a:tableStyleId>{5940675A-B579-460E-94D1-54222C63F5DA}</a:tableStyleId>
+              </a:tblPr>
+              <a:tblGrid>
+                <a:gridCol w="792861">
+                  <a:extLst>
+                    <a:ext uri="{9D8B030D-6E8A-4147-A177-3AD203B41FA5}">
+                      <a16:colId xmlns:a16="http://schemas.microsoft.com/office/drawing/2014/main" val="1246601127"/>
+                    </a:ext>
+                  </a:extLst>
+                </a:gridCol>
+                <a:gridCol w="1124649">
+                  <a:extLst>
+                    <a:ext uri="{9D8B030D-6E8A-4147-A177-3AD203B41FA5}">
+                      <a16:colId xmlns:a16="http://schemas.microsoft.com/office/drawing/2014/main" val="3698375014"/>
+                    </a:ext>
+                  </a:extLst>
+                </a:gridCol>
+              </a:tblGrid>
+              <a:tr h="370840">
+                <a:tc>
+                  <a:txBody>
+                    <a:bodyPr/>
+                    <a:lstStyle/>
+                    <a:p>
+                      <a:r>
+                        <a:rPr lang="en-US" altLang="zh-TW" dirty="0"/>
+                        <a:t>DAC1</a:t>
+                      </a:r>
+                      <a:endParaRPr lang="zh-TW" altLang="en-US" dirty="0"/>
+                    </a:p>
+                  </a:txBody>
+                  <a:tcPr/>
+                </a:tc>
+                <a:tc>
+                  <a:txBody>
+                    <a:bodyPr/>
+                    <a:lstStyle/>
+                    <a:p>
+                      <a:r>
+                        <a:rPr lang="en-US" altLang="zh-TW" dirty="0"/>
+                        <a:t>DAC_1_1</a:t>
+                      </a:r>
+                      <a:endParaRPr lang="zh-TW" altLang="en-US" dirty="0"/>
+                    </a:p>
+                  </a:txBody>
+                  <a:tcPr/>
+                </a:tc>
+                <a:extLst>
+                  <a:ext uri="{0D108BD9-81ED-4DB2-BD59-A6C34878D82A}">
+                    <a16:rowId xmlns:a16="http://schemas.microsoft.com/office/drawing/2014/main" val="285053684"/>
+                  </a:ext>
+                </a:extLst>
+              </a:tr>
+              <a:tr h="414420">
+                <a:tc>
+                  <a:txBody>
+                    <a:bodyPr/>
+                    <a:lstStyle/>
+                    <a:p>
+                      <a:pPr marL="0" marR="0" lvl="0" indent="0" algn="l" defTabSz="914400" rtl="0" eaLnBrk="1" fontAlgn="auto" latinLnBrk="0" hangingPunct="1">
+                        <a:lnSpc>
+                          <a:spcPct val="100000"/>
+                        </a:lnSpc>
+                        <a:spcBef>
+                          <a:spcPts val="0"/>
+                        </a:spcBef>
+                        <a:spcAft>
+                          <a:spcPts val="0"/>
+                        </a:spcAft>
+                        <a:buClrTx/>
+                        <a:buSzTx/>
+                        <a:buFontTx/>
+                        <a:buNone/>
+                        <a:tabLst/>
+                        <a:defRPr/>
+                      </a:pPr>
+                      <a:r>
+                        <a:rPr lang="en-US" altLang="zh-TW" dirty="0"/>
+                        <a:t>DAC3</a:t>
+                      </a:r>
+                      <a:endParaRPr lang="zh-TW" altLang="en-US" dirty="0"/>
+                    </a:p>
+                  </a:txBody>
+                  <a:tcPr/>
+                </a:tc>
+                <a:tc>
+                  <a:txBody>
+                    <a:bodyPr/>
+                    <a:lstStyle/>
+                    <a:p>
+                      <a:pPr marL="0" marR="0" lvl="0" indent="0" algn="l" defTabSz="914400" rtl="0" eaLnBrk="1" fontAlgn="auto" latinLnBrk="0" hangingPunct="1">
+                        <a:lnSpc>
+                          <a:spcPct val="100000"/>
+                        </a:lnSpc>
+                        <a:spcBef>
+                          <a:spcPts val="0"/>
+                        </a:spcBef>
+                        <a:spcAft>
+                          <a:spcPts val="0"/>
+                        </a:spcAft>
+                        <a:buClrTx/>
+                        <a:buSzTx/>
+                        <a:buFontTx/>
+                        <a:buNone/>
+                        <a:tabLst/>
+                        <a:defRPr/>
+                      </a:pPr>
+                      <a:r>
+                        <a:rPr lang="en-US" altLang="zh-TW" dirty="0"/>
+                        <a:t>DAC_2_2</a:t>
+                      </a:r>
+                      <a:endParaRPr lang="zh-TW" altLang="en-US" dirty="0"/>
+                    </a:p>
+                  </a:txBody>
+                  <a:tcPr/>
+                </a:tc>
+                <a:extLst>
+                  <a:ext uri="{0D108BD9-81ED-4DB2-BD59-A6C34878D82A}">
+                    <a16:rowId xmlns:a16="http://schemas.microsoft.com/office/drawing/2014/main" val="2261151463"/>
+                  </a:ext>
+                </a:extLst>
+              </a:tr>
+              <a:tr h="370840">
+                <a:tc>
+                  <a:txBody>
+                    <a:bodyPr/>
+                    <a:lstStyle/>
+                    <a:p>
+                      <a:r>
+                        <a:rPr lang="en-US" altLang="zh-TW" dirty="0"/>
+                        <a:t>DAC2</a:t>
+                      </a:r>
+                      <a:endParaRPr lang="zh-TW" altLang="en-US" dirty="0"/>
+                    </a:p>
+                  </a:txBody>
+                  <a:tcPr/>
+                </a:tc>
+                <a:tc>
+                  <a:txBody>
+                    <a:bodyPr/>
+                    <a:lstStyle/>
+                    <a:p>
+                      <a:r>
+                        <a:rPr lang="en-US" altLang="zh-TW" dirty="0"/>
+                        <a:t>DAC_2_1</a:t>
+                      </a:r>
+                      <a:endParaRPr lang="zh-TW" altLang="en-US" dirty="0"/>
+                    </a:p>
+                  </a:txBody>
+                  <a:tcPr/>
+                </a:tc>
+                <a:extLst>
+                  <a:ext uri="{0D108BD9-81ED-4DB2-BD59-A6C34878D82A}">
+                    <a16:rowId xmlns:a16="http://schemas.microsoft.com/office/drawing/2014/main" val="4158035046"/>
+                  </a:ext>
+                </a:extLst>
+              </a:tr>
+            </a:tbl>
+          </a:graphicData>
+        </a:graphic>
+      </p:graphicFrame>
+      <p:sp>
+        <p:nvSpPr>
+          <p:cNvPr id="10" name="文字方塊 9">
+            <a:extLst>
+              <a:ext uri="{FF2B5EF4-FFF2-40B4-BE49-F238E27FC236}">
+                <a16:creationId xmlns:a16="http://schemas.microsoft.com/office/drawing/2014/main" id="{73DABA2E-C440-2B90-279A-FB85B178020D}"/>
+              </a:ext>
+            </a:extLst>
+          </p:cNvPr>
+          <p:cNvSpPr txBox="1"/>
+          <p:nvPr/>
+        </p:nvSpPr>
+        <p:spPr>
+          <a:xfrm>
+            <a:off x="1431973" y="1268868"/>
+            <a:ext cx="1638300" cy="369332"/>
+          </a:xfrm>
+          <a:prstGeom prst="rect">
+            <a:avLst/>
+          </a:prstGeom>
+          <a:noFill/>
+        </p:spPr>
+        <p:txBody>
+          <a:bodyPr wrap="square" rtlCol="0">
+            <a:spAutoFit/>
+          </a:bodyPr>
+          <a:lstStyle/>
+          <a:p>
+            <a:r>
+              <a:rPr lang="zh-TW" altLang="en-US" dirty="0"/>
+              <a:t>電路安排</a:t>
+            </a:r>
+          </a:p>
+        </p:txBody>
+      </p:sp>
+    </p:spTree>
+    <p:extLst>
+      <p:ext uri="{BB962C8B-B14F-4D97-AF65-F5344CB8AC3E}">
+        <p14:creationId xmlns:p14="http://schemas.microsoft.com/office/powerpoint/2010/main" val="4187934997"/>
+      </p:ext>
+    </p:extLst>
+  </p:cSld>
+  <p:clrMapOvr>
+    <a:masterClrMapping/>
+  </p:clrMapOvr>
+</p:sld>
+</file>
+
+<file path=ppt/slides/slide4.xml><?xml version="1.0" encoding="utf-8"?>
+<p:sld xmlns:a="http://schemas.openxmlformats.org/drawingml/2006/main" xmlns:r="http://schemas.openxmlformats.org/officeDocument/2006/relationships" xmlns:p="http://schemas.openxmlformats.org/presentationml/2006/main">
+  <p:cSld>
+    <p:spTree>
+      <p:nvGrpSpPr>
+        <p:cNvPr id="1" name=""/>
+        <p:cNvGrpSpPr/>
+        <p:nvPr/>
+      </p:nvGrpSpPr>
+      <p:grpSpPr>
+        <a:xfrm>
+          <a:off x="0" y="0"/>
+          <a:ext cx="0" cy="0"/>
+          <a:chOff x="0" y="0"/>
+          <a:chExt cx="0" cy="0"/>
+        </a:xfrm>
+      </p:grpSpPr>
+      <p:pic>
+        <p:nvPicPr>
+          <p:cNvPr id="5" name="內容版面配置區 4">
+            <a:extLst>
+              <a:ext uri="{FF2B5EF4-FFF2-40B4-BE49-F238E27FC236}">
+                <a16:creationId xmlns:a16="http://schemas.microsoft.com/office/drawing/2014/main" id="{F39E6A1A-25A9-928B-7A76-C70B0AF3488B}"/>
+              </a:ext>
+            </a:extLst>
+          </p:cNvPr>
+          <p:cNvPicPr>
+            <a:picLocks noGrp="1" noChangeAspect="1"/>
+          </p:cNvPicPr>
+          <p:nvPr>
+            <p:ph idx="1"/>
+          </p:nvPr>
+        </p:nvPicPr>
+        <p:blipFill>
+          <a:blip r:embed="rId2"/>
+          <a:stretch>
+            <a:fillRect/>
+          </a:stretch>
+        </p:blipFill>
+        <p:spPr>
+          <a:xfrm>
+            <a:off x="3912111" y="1825625"/>
+            <a:ext cx="4367778" cy="4351338"/>
+          </a:xfrm>
+          <a:prstGeom prst="rect">
+            <a:avLst/>
+          </a:prstGeom>
+        </p:spPr>
+      </p:pic>
+      <p:sp>
+        <p:nvSpPr>
+          <p:cNvPr id="6" name="文字方塊 5">
+            <a:extLst>
+              <a:ext uri="{FF2B5EF4-FFF2-40B4-BE49-F238E27FC236}">
+                <a16:creationId xmlns:a16="http://schemas.microsoft.com/office/drawing/2014/main" id="{24A53D33-6872-0553-6F99-96632EA0BE71}"/>
+              </a:ext>
+            </a:extLst>
+          </p:cNvPr>
+          <p:cNvSpPr txBox="1"/>
+          <p:nvPr/>
+        </p:nvSpPr>
+        <p:spPr>
+          <a:xfrm>
+            <a:off x="9815804" y="3788229"/>
+            <a:ext cx="312906" cy="369332"/>
+          </a:xfrm>
+          <a:prstGeom prst="rect">
+            <a:avLst/>
+          </a:prstGeom>
+          <a:noFill/>
+        </p:spPr>
+        <p:txBody>
+          <a:bodyPr wrap="none" rtlCol="0">
+            <a:spAutoFit/>
+          </a:bodyPr>
+          <a:lstStyle/>
+          <a:p>
+            <a:r>
+              <a:rPr lang="en-US" altLang="zh-TW" dirty="0"/>
+              <a:t>X</a:t>
+            </a:r>
+            <a:endParaRPr lang="zh-TW" altLang="en-US" dirty="0"/>
+          </a:p>
+        </p:txBody>
+      </p:sp>
+      <p:sp>
+        <p:nvSpPr>
+          <p:cNvPr id="7" name="文字方塊 6">
+            <a:extLst>
+              <a:ext uri="{FF2B5EF4-FFF2-40B4-BE49-F238E27FC236}">
+                <a16:creationId xmlns:a16="http://schemas.microsoft.com/office/drawing/2014/main" id="{8B9242C9-501D-8CA5-94DB-A153508D4CBB}"/>
+              </a:ext>
+            </a:extLst>
+          </p:cNvPr>
+          <p:cNvSpPr txBox="1"/>
+          <p:nvPr/>
+        </p:nvSpPr>
+        <p:spPr>
+          <a:xfrm>
+            <a:off x="5783094" y="1017037"/>
+            <a:ext cx="309700" cy="369332"/>
+          </a:xfrm>
+          <a:prstGeom prst="rect">
+            <a:avLst/>
+          </a:prstGeom>
+          <a:noFill/>
+        </p:spPr>
+        <p:txBody>
+          <a:bodyPr wrap="none" rtlCol="0">
+            <a:spAutoFit/>
+          </a:bodyPr>
+          <a:lstStyle/>
+          <a:p>
+            <a:r>
+              <a:rPr lang="en-US" altLang="zh-TW" dirty="0"/>
+              <a:t>Y</a:t>
+            </a:r>
+            <a:endParaRPr lang="zh-TW" altLang="en-US" dirty="0"/>
+          </a:p>
+        </p:txBody>
+      </p:sp>
+      <p:cxnSp>
+        <p:nvCxnSpPr>
+          <p:cNvPr id="9" name="直線單箭頭接點 8">
+            <a:extLst>
+              <a:ext uri="{FF2B5EF4-FFF2-40B4-BE49-F238E27FC236}">
+                <a16:creationId xmlns:a16="http://schemas.microsoft.com/office/drawing/2014/main" id="{1FD00D63-0C77-6E4F-5A46-37082A49883A}"/>
+              </a:ext>
+            </a:extLst>
+          </p:cNvPr>
+          <p:cNvCxnSpPr/>
+          <p:nvPr/>
+        </p:nvCxnSpPr>
+        <p:spPr>
+          <a:xfrm flipV="1">
+            <a:off x="6680718" y="4001294"/>
+            <a:ext cx="2985796" cy="66853"/>
+          </a:xfrm>
+          <a:prstGeom prst="straightConnector1">
+            <a:avLst/>
+          </a:prstGeom>
+          <a:ln>
+            <a:tailEnd type="triangle"/>
+          </a:ln>
+        </p:spPr>
+        <p:style>
+          <a:lnRef idx="2">
+            <a:schemeClr val="accent1"/>
+          </a:lnRef>
+          <a:fillRef idx="0">
+            <a:schemeClr val="accent1"/>
+          </a:fillRef>
+          <a:effectRef idx="1">
+            <a:schemeClr val="accent1"/>
+          </a:effectRef>
+          <a:fontRef idx="minor">
+            <a:schemeClr val="tx1"/>
+          </a:fontRef>
+        </p:style>
+      </p:cxnSp>
+      <p:cxnSp>
+        <p:nvCxnSpPr>
+          <p:cNvPr id="11" name="直線單箭頭接點 10">
+            <a:extLst>
+              <a:ext uri="{FF2B5EF4-FFF2-40B4-BE49-F238E27FC236}">
+                <a16:creationId xmlns:a16="http://schemas.microsoft.com/office/drawing/2014/main" id="{E7510A0E-876C-C7D9-7302-9982D20FBD79}"/>
+              </a:ext>
+            </a:extLst>
+          </p:cNvPr>
+          <p:cNvCxnSpPr/>
+          <p:nvPr/>
+        </p:nvCxnSpPr>
+        <p:spPr>
+          <a:xfrm flipV="1">
+            <a:off x="6096000" y="1386369"/>
+            <a:ext cx="0" cy="2681778"/>
+          </a:xfrm>
+          <a:prstGeom prst="straightConnector1">
+            <a:avLst/>
+          </a:prstGeom>
+          <a:ln>
+            <a:tailEnd type="triangle"/>
+          </a:ln>
+        </p:spPr>
+        <p:style>
+          <a:lnRef idx="2">
+            <a:schemeClr val="accent1"/>
+          </a:lnRef>
+          <a:fillRef idx="0">
+            <a:schemeClr val="accent1"/>
+          </a:fillRef>
+          <a:effectRef idx="1">
+            <a:schemeClr val="accent1"/>
+          </a:effectRef>
+          <a:fontRef idx="minor">
+            <a:schemeClr val="tx1"/>
+          </a:fontRef>
+        </p:style>
+      </p:cxnSp>
+    </p:spTree>
+    <p:extLst>
+      <p:ext uri="{BB962C8B-B14F-4D97-AF65-F5344CB8AC3E}">
+        <p14:creationId xmlns:p14="http://schemas.microsoft.com/office/powerpoint/2010/main" val="2045925363"/>
+      </p:ext>
+    </p:extLst>
+  </p:cSld>
+  <p:clrMapOvr>
+    <a:masterClrMapping/>
+  </p:clrMapOvr>
+</p:sld>
+</file>
+
+<file path=ppt/slides/slide5.xml><?xml version="1.0" encoding="utf-8"?>
+<p:sld xmlns:a="http://schemas.openxmlformats.org/drawingml/2006/main" xmlns:r="http://schemas.openxmlformats.org/officeDocument/2006/relationships" xmlns:p="http://schemas.openxmlformats.org/presentationml/2006/main">
+  <p:cSld>
+    <p:spTree>
+      <p:nvGrpSpPr>
         <p:cNvPr id="1" name="">
           <a:extLst>
             <a:ext uri="{FF2B5EF4-FFF2-40B4-BE49-F238E27FC236}">
@@ -4583,7 +6065,7 @@
 </p:sld>
 </file>
 
-<file path=ppt/slides/slide4.xml><?xml version="1.0" encoding="utf-8"?>
+<file path=ppt/slides/slide6.xml><?xml version="1.0" encoding="utf-8"?>
 <p:sld xmlns:a="http://schemas.openxmlformats.org/drawingml/2006/main" xmlns:r="http://schemas.openxmlformats.org/officeDocument/2006/relationships" xmlns:p="http://schemas.openxmlformats.org/presentationml/2006/main">
   <p:cSld>
     <p:spTree>
@@ -4606,6 +6088,570 @@
           <a:chExt cx="0" cy="0"/>
         </a:xfrm>
       </p:grpSpPr>
+      <p:pic>
+        <p:nvPicPr>
+          <p:cNvPr id="3" name="圖片 2" descr="IRS.&#10;&#10;AI 產生的內容可能不正確。">
+            <a:extLst>
+              <a:ext uri="{FF2B5EF4-FFF2-40B4-BE49-F238E27FC236}">
+                <a16:creationId xmlns:a16="http://schemas.microsoft.com/office/drawing/2014/main" id="{A6DCFA1D-1E21-9F04-FC09-B4C35698F03A}"/>
+              </a:ext>
+            </a:extLst>
+          </p:cNvPr>
+          <p:cNvPicPr>
+            <a:picLocks noChangeAspect="1"/>
+          </p:cNvPicPr>
+          <p:nvPr/>
+        </p:nvPicPr>
+        <p:blipFill>
+          <a:blip r:embed="rId2"/>
+          <a:stretch>
+            <a:fillRect/>
+          </a:stretch>
+        </p:blipFill>
+        <p:spPr>
+          <a:xfrm>
+            <a:off x="0" y="0"/>
+            <a:ext cx="5957536" cy="6858000"/>
+          </a:xfrm>
+          <a:prstGeom prst="rect">
+            <a:avLst/>
+          </a:prstGeom>
+        </p:spPr>
+      </p:pic>
+      <p:sp>
+        <p:nvSpPr>
+          <p:cNvPr id="4" name="手繪多邊形: 圖案 3">
+            <a:extLst>
+              <a:ext uri="{FF2B5EF4-FFF2-40B4-BE49-F238E27FC236}">
+                <a16:creationId xmlns:a16="http://schemas.microsoft.com/office/drawing/2014/main" id="{BE1EEFD6-022C-26FD-0F58-384E5DB117F5}"/>
+              </a:ext>
+            </a:extLst>
+          </p:cNvPr>
+          <p:cNvSpPr/>
+          <p:nvPr/>
+        </p:nvSpPr>
+        <p:spPr>
+          <a:xfrm>
+            <a:off x="3535680" y="2571039"/>
+            <a:ext cx="1280160" cy="2916131"/>
+          </a:xfrm>
+          <a:custGeom>
+            <a:avLst/>
+            <a:gdLst>
+              <a:gd name="csX0" fmla="*/ 1188720 w 1280160"/>
+              <a:gd name="csY0" fmla="*/ 29921 h 2916131"/>
+              <a:gd name="csX1" fmla="*/ 914400 w 1280160"/>
+              <a:gd name="csY1" fmla="*/ 19761 h 2916131"/>
+              <a:gd name="csX2" fmla="*/ 812800 w 1280160"/>
+              <a:gd name="csY2" fmla="*/ 40081 h 2916131"/>
+              <a:gd name="csX3" fmla="*/ 772160 w 1280160"/>
+              <a:gd name="csY3" fmla="*/ 60401 h 2916131"/>
+              <a:gd name="csX4" fmla="*/ 721360 w 1280160"/>
+              <a:gd name="csY4" fmla="*/ 80721 h 2916131"/>
+              <a:gd name="csX5" fmla="*/ 609600 w 1280160"/>
+              <a:gd name="csY5" fmla="*/ 131521 h 2916131"/>
+              <a:gd name="csX6" fmla="*/ 568960 w 1280160"/>
+              <a:gd name="csY6" fmla="*/ 151841 h 2916131"/>
+              <a:gd name="csX7" fmla="*/ 518160 w 1280160"/>
+              <a:gd name="csY7" fmla="*/ 172161 h 2916131"/>
+              <a:gd name="csX8" fmla="*/ 426720 w 1280160"/>
+              <a:gd name="csY8" fmla="*/ 243281 h 2916131"/>
+              <a:gd name="csX9" fmla="*/ 274320 w 1280160"/>
+              <a:gd name="csY9" fmla="*/ 456641 h 2916131"/>
+              <a:gd name="csX10" fmla="*/ 213360 w 1280160"/>
+              <a:gd name="csY10" fmla="*/ 568401 h 2916131"/>
+              <a:gd name="csX11" fmla="*/ 142240 w 1280160"/>
+              <a:gd name="csY11" fmla="*/ 741121 h 2916131"/>
+              <a:gd name="csX12" fmla="*/ 20320 w 1280160"/>
+              <a:gd name="csY12" fmla="*/ 1198321 h 2916131"/>
+              <a:gd name="csX13" fmla="*/ 0 w 1280160"/>
+              <a:gd name="csY13" fmla="*/ 1371041 h 2916131"/>
+              <a:gd name="csX14" fmla="*/ 20320 w 1280160"/>
+              <a:gd name="csY14" fmla="*/ 1828241 h 2916131"/>
+              <a:gd name="csX15" fmla="*/ 101600 w 1280160"/>
+              <a:gd name="csY15" fmla="*/ 2031441 h 2916131"/>
+              <a:gd name="csX16" fmla="*/ 162560 w 1280160"/>
+              <a:gd name="csY16" fmla="*/ 2163521 h 2916131"/>
+              <a:gd name="csX17" fmla="*/ 274320 w 1280160"/>
+              <a:gd name="csY17" fmla="*/ 2326081 h 2916131"/>
+              <a:gd name="csX18" fmla="*/ 314960 w 1280160"/>
+              <a:gd name="csY18" fmla="*/ 2387041 h 2916131"/>
+              <a:gd name="csX19" fmla="*/ 345440 w 1280160"/>
+              <a:gd name="csY19" fmla="*/ 2458161 h 2916131"/>
+              <a:gd name="csX20" fmla="*/ 386080 w 1280160"/>
+              <a:gd name="csY20" fmla="*/ 2498801 h 2916131"/>
+              <a:gd name="csX21" fmla="*/ 406400 w 1280160"/>
+              <a:gd name="csY21" fmla="*/ 2529281 h 2916131"/>
+              <a:gd name="csX22" fmla="*/ 508000 w 1280160"/>
+              <a:gd name="csY22" fmla="*/ 2600401 h 2916131"/>
+              <a:gd name="csX23" fmla="*/ 609600 w 1280160"/>
+              <a:gd name="csY23" fmla="*/ 2651201 h 2916131"/>
+              <a:gd name="csX24" fmla="*/ 660400 w 1280160"/>
+              <a:gd name="csY24" fmla="*/ 2661361 h 2916131"/>
+              <a:gd name="csX25" fmla="*/ 833120 w 1280160"/>
+              <a:gd name="csY25" fmla="*/ 2681681 h 2916131"/>
+              <a:gd name="csX26" fmla="*/ 873760 w 1280160"/>
+              <a:gd name="csY26" fmla="*/ 2691841 h 2916131"/>
+              <a:gd name="csX27" fmla="*/ 955040 w 1280160"/>
+              <a:gd name="csY27" fmla="*/ 2702001 h 2916131"/>
+              <a:gd name="csX28" fmla="*/ 1026160 w 1280160"/>
+              <a:gd name="csY28" fmla="*/ 2712161 h 2916131"/>
+              <a:gd name="csX29" fmla="*/ 1280160 w 1280160"/>
+              <a:gd name="csY29" fmla="*/ 2793441 h 2916131"/>
+              <a:gd name="csX30" fmla="*/ 1198880 w 1280160"/>
+              <a:gd name="csY30" fmla="*/ 2661361 h 2916131"/>
+              <a:gd name="csX31" fmla="*/ 1148080 w 1280160"/>
+              <a:gd name="csY31" fmla="*/ 2580081 h 2916131"/>
+              <a:gd name="csX32" fmla="*/ 1198880 w 1280160"/>
+              <a:gd name="csY32" fmla="*/ 2854401 h 2916131"/>
+              <a:gd name="csX33" fmla="*/ 1219200 w 1280160"/>
+              <a:gd name="csY33" fmla="*/ 2762961 h 2916131"/>
+              <a:gd name="csX34" fmla="*/ 1239520 w 1280160"/>
+              <a:gd name="csY34" fmla="*/ 2752801 h 2916131"/>
+            </a:gdLst>
+            <a:ahLst/>
+            <a:cxnLst>
+              <a:cxn ang="0">
+                <a:pos x="csX0" y="csY0"/>
+              </a:cxn>
+              <a:cxn ang="0">
+                <a:pos x="csX1" y="csY1"/>
+              </a:cxn>
+              <a:cxn ang="0">
+                <a:pos x="csX2" y="csY2"/>
+              </a:cxn>
+              <a:cxn ang="0">
+                <a:pos x="csX3" y="csY3"/>
+              </a:cxn>
+              <a:cxn ang="0">
+                <a:pos x="csX4" y="csY4"/>
+              </a:cxn>
+              <a:cxn ang="0">
+                <a:pos x="csX5" y="csY5"/>
+              </a:cxn>
+              <a:cxn ang="0">
+                <a:pos x="csX6" y="csY6"/>
+              </a:cxn>
+              <a:cxn ang="0">
+                <a:pos x="csX7" y="csY7"/>
+              </a:cxn>
+              <a:cxn ang="0">
+                <a:pos x="csX8" y="csY8"/>
+              </a:cxn>
+              <a:cxn ang="0">
+                <a:pos x="csX9" y="csY9"/>
+              </a:cxn>
+              <a:cxn ang="0">
+                <a:pos x="csX10" y="csY10"/>
+              </a:cxn>
+              <a:cxn ang="0">
+                <a:pos x="csX11" y="csY11"/>
+              </a:cxn>
+              <a:cxn ang="0">
+                <a:pos x="csX12" y="csY12"/>
+              </a:cxn>
+              <a:cxn ang="0">
+                <a:pos x="csX13" y="csY13"/>
+              </a:cxn>
+              <a:cxn ang="0">
+                <a:pos x="csX14" y="csY14"/>
+              </a:cxn>
+              <a:cxn ang="0">
+                <a:pos x="csX15" y="csY15"/>
+              </a:cxn>
+              <a:cxn ang="0">
+                <a:pos x="csX16" y="csY16"/>
+              </a:cxn>
+              <a:cxn ang="0">
+                <a:pos x="csX17" y="csY17"/>
+              </a:cxn>
+              <a:cxn ang="0">
+                <a:pos x="csX18" y="csY18"/>
+              </a:cxn>
+              <a:cxn ang="0">
+                <a:pos x="csX19" y="csY19"/>
+              </a:cxn>
+              <a:cxn ang="0">
+                <a:pos x="csX20" y="csY20"/>
+              </a:cxn>
+              <a:cxn ang="0">
+                <a:pos x="csX21" y="csY21"/>
+              </a:cxn>
+              <a:cxn ang="0">
+                <a:pos x="csX22" y="csY22"/>
+              </a:cxn>
+              <a:cxn ang="0">
+                <a:pos x="csX23" y="csY23"/>
+              </a:cxn>
+              <a:cxn ang="0">
+                <a:pos x="csX24" y="csY24"/>
+              </a:cxn>
+              <a:cxn ang="0">
+                <a:pos x="csX25" y="csY25"/>
+              </a:cxn>
+              <a:cxn ang="0">
+                <a:pos x="csX26" y="csY26"/>
+              </a:cxn>
+              <a:cxn ang="0">
+                <a:pos x="csX27" y="csY27"/>
+              </a:cxn>
+              <a:cxn ang="0">
+                <a:pos x="csX28" y="csY28"/>
+              </a:cxn>
+              <a:cxn ang="0">
+                <a:pos x="csX29" y="csY29"/>
+              </a:cxn>
+              <a:cxn ang="0">
+                <a:pos x="csX30" y="csY30"/>
+              </a:cxn>
+              <a:cxn ang="0">
+                <a:pos x="csX31" y="csY31"/>
+              </a:cxn>
+              <a:cxn ang="0">
+                <a:pos x="csX32" y="csY32"/>
+              </a:cxn>
+              <a:cxn ang="0">
+                <a:pos x="csX33" y="csY33"/>
+              </a:cxn>
+              <a:cxn ang="0">
+                <a:pos x="csX34" y="csY34"/>
+              </a:cxn>
+            </a:cxnLst>
+            <a:rect l="l" t="t" r="r" b="b"/>
+            <a:pathLst>
+              <a:path w="1280160" h="2916131">
+                <a:moveTo>
+                  <a:pt x="1188720" y="29921"/>
+                </a:moveTo>
+                <a:cubicBezTo>
+                  <a:pt x="1074453" y="-15786"/>
+                  <a:pt x="1132494" y="-685"/>
+                  <a:pt x="914400" y="19761"/>
+                </a:cubicBezTo>
+                <a:cubicBezTo>
+                  <a:pt x="880013" y="22985"/>
+                  <a:pt x="812800" y="40081"/>
+                  <a:pt x="812800" y="40081"/>
+                </a:cubicBezTo>
+                <a:cubicBezTo>
+                  <a:pt x="799253" y="46854"/>
+                  <a:pt x="786000" y="54250"/>
+                  <a:pt x="772160" y="60401"/>
+                </a:cubicBezTo>
+                <a:cubicBezTo>
+                  <a:pt x="755494" y="67808"/>
+                  <a:pt x="737371" y="71988"/>
+                  <a:pt x="721360" y="80721"/>
+                </a:cubicBezTo>
+                <a:cubicBezTo>
+                  <a:pt x="619601" y="136226"/>
+                  <a:pt x="703037" y="112834"/>
+                  <a:pt x="609600" y="131521"/>
+                </a:cubicBezTo>
+                <a:cubicBezTo>
+                  <a:pt x="596053" y="138294"/>
+                  <a:pt x="582800" y="145690"/>
+                  <a:pt x="568960" y="151841"/>
+                </a:cubicBezTo>
+                <a:cubicBezTo>
+                  <a:pt x="552294" y="159248"/>
+                  <a:pt x="533501" y="162299"/>
+                  <a:pt x="518160" y="172161"/>
+                </a:cubicBezTo>
+                <a:cubicBezTo>
+                  <a:pt x="485679" y="193042"/>
+                  <a:pt x="454024" y="215977"/>
+                  <a:pt x="426720" y="243281"/>
+                </a:cubicBezTo>
+                <a:cubicBezTo>
+                  <a:pt x="349381" y="320620"/>
+                  <a:pt x="354284" y="310040"/>
+                  <a:pt x="274320" y="456641"/>
+                </a:cubicBezTo>
+                <a:cubicBezTo>
+                  <a:pt x="254000" y="493894"/>
+                  <a:pt x="231230" y="529912"/>
+                  <a:pt x="213360" y="568401"/>
+                </a:cubicBezTo>
+                <a:cubicBezTo>
+                  <a:pt x="187140" y="624874"/>
+                  <a:pt x="162748" y="682332"/>
+                  <a:pt x="142240" y="741121"/>
+                </a:cubicBezTo>
+                <a:cubicBezTo>
+                  <a:pt x="87254" y="898748"/>
+                  <a:pt x="47369" y="1036029"/>
+                  <a:pt x="20320" y="1198321"/>
+                </a:cubicBezTo>
+                <a:cubicBezTo>
+                  <a:pt x="10790" y="1255503"/>
+                  <a:pt x="6773" y="1313468"/>
+                  <a:pt x="0" y="1371041"/>
+                </a:cubicBezTo>
+                <a:cubicBezTo>
+                  <a:pt x="6773" y="1523441"/>
+                  <a:pt x="-2876" y="1677464"/>
+                  <a:pt x="20320" y="1828241"/>
+                </a:cubicBezTo>
+                <a:cubicBezTo>
+                  <a:pt x="31413" y="1900344"/>
+                  <a:pt x="71029" y="1965204"/>
+                  <a:pt x="101600" y="2031441"/>
+                </a:cubicBezTo>
+                <a:cubicBezTo>
+                  <a:pt x="121920" y="2075468"/>
+                  <a:pt x="138038" y="2121689"/>
+                  <a:pt x="162560" y="2163521"/>
+                </a:cubicBezTo>
+                <a:cubicBezTo>
+                  <a:pt x="195815" y="2220250"/>
+                  <a:pt x="237277" y="2271751"/>
+                  <a:pt x="274320" y="2326081"/>
+                </a:cubicBezTo>
+                <a:cubicBezTo>
+                  <a:pt x="288078" y="2346259"/>
+                  <a:pt x="305340" y="2364594"/>
+                  <a:pt x="314960" y="2387041"/>
+                </a:cubicBezTo>
+                <a:cubicBezTo>
+                  <a:pt x="325120" y="2410748"/>
+                  <a:pt x="331593" y="2436401"/>
+                  <a:pt x="345440" y="2458161"/>
+                </a:cubicBezTo>
+                <a:cubicBezTo>
+                  <a:pt x="355725" y="2474324"/>
+                  <a:pt x="373612" y="2484255"/>
+                  <a:pt x="386080" y="2498801"/>
+                </a:cubicBezTo>
+                <a:cubicBezTo>
+                  <a:pt x="394027" y="2508072"/>
+                  <a:pt x="397766" y="2520647"/>
+                  <a:pt x="406400" y="2529281"/>
+                </a:cubicBezTo>
+                <a:cubicBezTo>
+                  <a:pt x="419800" y="2542681"/>
+                  <a:pt x="500413" y="2596133"/>
+                  <a:pt x="508000" y="2600401"/>
+                </a:cubicBezTo>
+                <a:cubicBezTo>
+                  <a:pt x="541001" y="2618964"/>
+                  <a:pt x="572471" y="2643775"/>
+                  <a:pt x="609600" y="2651201"/>
+                </a:cubicBezTo>
+                <a:cubicBezTo>
+                  <a:pt x="626533" y="2654588"/>
+                  <a:pt x="643305" y="2658919"/>
+                  <a:pt x="660400" y="2661361"/>
+                </a:cubicBezTo>
+                <a:cubicBezTo>
+                  <a:pt x="717505" y="2669519"/>
+                  <a:pt x="776140" y="2672184"/>
+                  <a:pt x="833120" y="2681681"/>
+                </a:cubicBezTo>
+                <a:cubicBezTo>
+                  <a:pt x="846894" y="2683977"/>
+                  <a:pt x="859986" y="2689545"/>
+                  <a:pt x="873760" y="2691841"/>
+                </a:cubicBezTo>
+                <a:cubicBezTo>
+                  <a:pt x="900693" y="2696330"/>
+                  <a:pt x="927975" y="2698392"/>
+                  <a:pt x="955040" y="2702001"/>
+                </a:cubicBezTo>
+                <a:lnTo>
+                  <a:pt x="1026160" y="2712161"/>
+                </a:lnTo>
+                <a:cubicBezTo>
+                  <a:pt x="1225215" y="2782416"/>
+                  <a:pt x="1139649" y="2758313"/>
+                  <a:pt x="1280160" y="2793441"/>
+                </a:cubicBezTo>
+                <a:lnTo>
+                  <a:pt x="1198880" y="2661361"/>
+                </a:lnTo>
+                <a:cubicBezTo>
+                  <a:pt x="1182063" y="2634195"/>
+                  <a:pt x="1148080" y="2580081"/>
+                  <a:pt x="1148080" y="2580081"/>
+                </a:cubicBezTo>
+                <a:cubicBezTo>
+                  <a:pt x="1149416" y="2602122"/>
+                  <a:pt x="1122459" y="3083665"/>
+                  <a:pt x="1198880" y="2854401"/>
+                </a:cubicBezTo>
+                <a:cubicBezTo>
+                  <a:pt x="1200184" y="2850489"/>
+                  <a:pt x="1208045" y="2777834"/>
+                  <a:pt x="1219200" y="2762961"/>
+                </a:cubicBezTo>
+                <a:cubicBezTo>
+                  <a:pt x="1223744" y="2756903"/>
+                  <a:pt x="1232747" y="2756188"/>
+                  <a:pt x="1239520" y="2752801"/>
+                </a:cubicBezTo>
+              </a:path>
+            </a:pathLst>
+          </a:custGeom>
+          <a:noFill/>
+          <a:ln>
+            <a:solidFill>
+              <a:srgbClr val="FFFF00"/>
+            </a:solidFill>
+          </a:ln>
+        </p:spPr>
+        <p:style>
+          <a:lnRef idx="2">
+            <a:schemeClr val="accent1">
+              <a:shade val="15000"/>
+            </a:schemeClr>
+          </a:lnRef>
+          <a:fillRef idx="1">
+            <a:schemeClr val="accent1"/>
+          </a:fillRef>
+          <a:effectRef idx="0">
+            <a:schemeClr val="accent1"/>
+          </a:effectRef>
+          <a:fontRef idx="minor">
+            <a:schemeClr val="lt1"/>
+          </a:fontRef>
+        </p:style>
+        <p:txBody>
+          <a:bodyPr rtlCol="0" anchor="ctr"/>
+          <a:lstStyle/>
+          <a:p>
+            <a:pPr algn="ctr"/>
+            <a:endParaRPr lang="zh-TW" altLang="en-US"/>
+          </a:p>
+        </p:txBody>
+      </p:sp>
+      <p:sp>
+        <p:nvSpPr>
+          <p:cNvPr id="5" name="文字方塊 4">
+            <a:extLst>
+              <a:ext uri="{FF2B5EF4-FFF2-40B4-BE49-F238E27FC236}">
+                <a16:creationId xmlns:a16="http://schemas.microsoft.com/office/drawing/2014/main" id="{5AF319AF-90A7-3E70-8356-3ADE81FCDEE2}"/>
+              </a:ext>
+            </a:extLst>
+          </p:cNvPr>
+          <p:cNvSpPr txBox="1"/>
+          <p:nvPr/>
+        </p:nvSpPr>
+        <p:spPr>
+          <a:xfrm>
+            <a:off x="6490546" y="5487170"/>
+            <a:ext cx="4857420" cy="369332"/>
+          </a:xfrm>
+          <a:prstGeom prst="rect">
+            <a:avLst/>
+          </a:prstGeom>
+          <a:noFill/>
+        </p:spPr>
+        <p:txBody>
+          <a:bodyPr wrap="none" rtlCol="0">
+            <a:spAutoFit/>
+          </a:bodyPr>
+          <a:lstStyle/>
+          <a:p>
+            <a:r>
+              <a:rPr lang="en-US" altLang="zh-TW" dirty="0"/>
+              <a:t>PD</a:t>
+            </a:r>
+            <a:r>
+              <a:rPr lang="zh-TW" altLang="en-US" dirty="0"/>
+              <a:t>之 </a:t>
+            </a:r>
+            <a:r>
+              <a:rPr lang="en-US" altLang="zh-TW" dirty="0"/>
+              <a:t>J6</a:t>
+            </a:r>
+            <a:r>
+              <a:rPr lang="zh-TW" altLang="en-US" dirty="0"/>
+              <a:t> 與 邏輯版 </a:t>
+            </a:r>
+            <a:r>
+              <a:rPr lang="en-US" altLang="zh-TW" dirty="0"/>
+              <a:t>J5</a:t>
+            </a:r>
+            <a:r>
+              <a:rPr lang="zh-TW" altLang="en-US" dirty="0"/>
+              <a:t> 連接，傳送</a:t>
+            </a:r>
+            <a:r>
+              <a:rPr lang="en-US" altLang="zh-TW" dirty="0"/>
+              <a:t>PD</a:t>
+            </a:r>
+            <a:r>
+              <a:rPr lang="zh-TW" altLang="en-US" dirty="0"/>
+              <a:t>訊號給</a:t>
+            </a:r>
+            <a:r>
+              <a:rPr lang="en-US" altLang="zh-TW" dirty="0"/>
+              <a:t>ADC</a:t>
+            </a:r>
+            <a:endParaRPr lang="zh-TW" altLang="en-US" dirty="0"/>
+          </a:p>
+        </p:txBody>
+      </p:sp>
+      <p:pic>
+        <p:nvPicPr>
+          <p:cNvPr id="7" name="圖片 6" descr="The diagram shows a sequence of numbered components connected to various power and ground lines, including PD-1 to PD-3 and a signal line PD_SIG.&#10;&#10;AI 產生的內容可能不正確。">
+            <a:extLst>
+              <a:ext uri="{FF2B5EF4-FFF2-40B4-BE49-F238E27FC236}">
+                <a16:creationId xmlns:a16="http://schemas.microsoft.com/office/drawing/2014/main" id="{675AC4B2-F76D-DA07-EEA3-CE08F6F6CAE9}"/>
+              </a:ext>
+            </a:extLst>
+          </p:cNvPr>
+          <p:cNvPicPr>
+            <a:picLocks noChangeAspect="1"/>
+          </p:cNvPicPr>
+          <p:nvPr/>
+        </p:nvPicPr>
+        <p:blipFill>
+          <a:blip r:embed="rId3"/>
+          <a:stretch>
+            <a:fillRect/>
+          </a:stretch>
+        </p:blipFill>
+        <p:spPr>
+          <a:xfrm>
+            <a:off x="6490546" y="-1"/>
+            <a:ext cx="5552635" cy="2571039"/>
+          </a:xfrm>
+          <a:prstGeom prst="rect">
+            <a:avLst/>
+          </a:prstGeom>
+        </p:spPr>
+      </p:pic>
+      <p:pic>
+        <p:nvPicPr>
+          <p:cNvPr id="9" name="圖片 8" descr="The image depicts a circuit diagram with various components, including a J5 connector, multiple PD-signals, and GND connections, with numerical values indicating voltage levels.&#10;&#10;AI 產生的內容可能不正確。">
+            <a:extLst>
+              <a:ext uri="{FF2B5EF4-FFF2-40B4-BE49-F238E27FC236}">
+                <a16:creationId xmlns:a16="http://schemas.microsoft.com/office/drawing/2014/main" id="{2461CD80-8119-8133-5C51-CA4AE052F46F}"/>
+              </a:ext>
+            </a:extLst>
+          </p:cNvPr>
+          <p:cNvPicPr>
+            <a:picLocks noChangeAspect="1"/>
+          </p:cNvPicPr>
+          <p:nvPr/>
+        </p:nvPicPr>
+        <p:blipFill>
+          <a:blip r:embed="rId4"/>
+          <a:stretch>
+            <a:fillRect/>
+          </a:stretch>
+        </p:blipFill>
+        <p:spPr>
+          <a:xfrm>
+            <a:off x="6490546" y="2571038"/>
+            <a:ext cx="5560003" cy="2788362"/>
+          </a:xfrm>
+          <a:prstGeom prst="rect">
+            <a:avLst/>
+          </a:prstGeom>
+        </p:spPr>
+      </p:pic>
     </p:spTree>
     <p:extLst>
       <p:ext uri="{BB962C8B-B14F-4D97-AF65-F5344CB8AC3E}">
@@ -4619,7 +6665,7 @@
 </p:sld>
 </file>
 
-<file path=ppt/slides/slide5.xml><?xml version="1.0" encoding="utf-8"?>
+<file path=ppt/slides/slide7.xml><?xml version="1.0" encoding="utf-8"?>
 <p:sld xmlns:a="http://schemas.openxmlformats.org/drawingml/2006/main" xmlns:r="http://schemas.openxmlformats.org/officeDocument/2006/relationships" xmlns:p="http://schemas.openxmlformats.org/presentationml/2006/main">
   <p:cSld>
     <p:spTree>
@@ -4642,10 +6688,169 @@
           <a:chExt cx="0" cy="0"/>
         </a:xfrm>
       </p:grpSpPr>
+      <p:pic>
+        <p:nvPicPr>
+          <p:cNvPr id="3" name="圖片 2" descr="The text appears to be a list of electronic components and connections, including ground (GND), various integrated circuits (ICs), resistors (R1, R2), diodes (DAC1, DAC2, DAC3), and other electrical symbols, with some values and voltage levels specified. It seems to be a schematic or circuit diagram.&#10;&#10;AI 產生的內容可能不正確。">
+            <a:extLst>
+              <a:ext uri="{FF2B5EF4-FFF2-40B4-BE49-F238E27FC236}">
+                <a16:creationId xmlns:a16="http://schemas.microsoft.com/office/drawing/2014/main" id="{9DC37871-889B-C1C4-C91B-32145F1B2C3C}"/>
+              </a:ext>
+            </a:extLst>
+          </p:cNvPr>
+          <p:cNvPicPr>
+            <a:picLocks noChangeAspect="1"/>
+          </p:cNvPicPr>
+          <p:nvPr/>
+        </p:nvPicPr>
+        <p:blipFill>
+          <a:blip r:embed="rId2"/>
+          <a:stretch>
+            <a:fillRect/>
+          </a:stretch>
+        </p:blipFill>
+        <p:spPr>
+          <a:xfrm>
+            <a:off x="1805650" y="318405"/>
+            <a:ext cx="8349205" cy="3110595"/>
+          </a:xfrm>
+          <a:prstGeom prst="rect">
+            <a:avLst/>
+          </a:prstGeom>
+        </p:spPr>
+      </p:pic>
+      <p:sp>
+        <p:nvSpPr>
+          <p:cNvPr id="4" name="文字方塊 3">
+            <a:extLst>
+              <a:ext uri="{FF2B5EF4-FFF2-40B4-BE49-F238E27FC236}">
+                <a16:creationId xmlns:a16="http://schemas.microsoft.com/office/drawing/2014/main" id="{A1383500-FAA1-676B-01F6-ADFFBD48FFCE}"/>
+              </a:ext>
+            </a:extLst>
+          </p:cNvPr>
+          <p:cNvSpPr txBox="1"/>
+          <p:nvPr/>
+        </p:nvSpPr>
+        <p:spPr>
+          <a:xfrm>
+            <a:off x="680055" y="3901437"/>
+            <a:ext cx="5415945" cy="646331"/>
+          </a:xfrm>
+          <a:prstGeom prst="rect">
+            <a:avLst/>
+          </a:prstGeom>
+          <a:noFill/>
+        </p:spPr>
+        <p:txBody>
+          <a:bodyPr wrap="square" rtlCol="0">
+            <a:spAutoFit/>
+          </a:bodyPr>
+          <a:lstStyle/>
+          <a:p>
+            <a:r>
+              <a:rPr lang="en-US" altLang="zh-TW" dirty="0"/>
+              <a:t>Sensor </a:t>
+            </a:r>
+            <a:r>
+              <a:rPr lang="zh-TW" altLang="en-US" dirty="0"/>
+              <a:t>之 </a:t>
+            </a:r>
+            <a:r>
+              <a:rPr lang="en-US" altLang="zh-TW" dirty="0"/>
+              <a:t>J8, J9 ,J10 </a:t>
+            </a:r>
+            <a:r>
+              <a:rPr lang="zh-TW" altLang="en-US" dirty="0"/>
+              <a:t>連接器連接到 </a:t>
+            </a:r>
+            <a:r>
+              <a:rPr lang="en-US" altLang="zh-TW" dirty="0"/>
+              <a:t>OH</a:t>
+            </a:r>
+            <a:r>
+              <a:rPr lang="zh-TW" altLang="en-US" dirty="0"/>
+              <a:t>，傳送</a:t>
+            </a:r>
+            <a:r>
+              <a:rPr lang="en-US" altLang="zh-TW" dirty="0"/>
+              <a:t>DAC</a:t>
+            </a:r>
+            <a:r>
+              <a:rPr lang="zh-TW" altLang="en-US" dirty="0"/>
+              <a:t>訊號與輸入溫度計訊號</a:t>
+            </a:r>
+          </a:p>
+        </p:txBody>
+      </p:sp>
+      <p:pic>
+        <p:nvPicPr>
+          <p:cNvPr id="6" name="圖片 5" descr="The diagram depicts a digital circuit with five inputs and outputs, including a temperature sensor (FOG_TEMP2), a positive voltage supply (+5V), and two digital-to-analog converters (DACs) with their positive and negative outputs.&#10;&#10;AI 產生的內容可能不正確。">
+            <a:extLst>
+              <a:ext uri="{FF2B5EF4-FFF2-40B4-BE49-F238E27FC236}">
+                <a16:creationId xmlns:a16="http://schemas.microsoft.com/office/drawing/2014/main" id="{A3BDB45A-5F6F-F5AC-0C87-C59B72B7FD50}"/>
+              </a:ext>
+            </a:extLst>
+          </p:cNvPr>
+          <p:cNvPicPr>
+            <a:picLocks noChangeAspect="1"/>
+          </p:cNvPicPr>
+          <p:nvPr/>
+        </p:nvPicPr>
+        <p:blipFill>
+          <a:blip r:embed="rId3"/>
+          <a:stretch>
+            <a:fillRect/>
+          </a:stretch>
+        </p:blipFill>
+        <p:spPr>
+          <a:xfrm>
+            <a:off x="6481822" y="3653983"/>
+            <a:ext cx="5372843" cy="3133047"/>
+          </a:xfrm>
+          <a:prstGeom prst="rect">
+            <a:avLst/>
+          </a:prstGeom>
+        </p:spPr>
+      </p:pic>
     </p:spTree>
     <p:extLst>
       <p:ext uri="{BB962C8B-B14F-4D97-AF65-F5344CB8AC3E}">
         <p14:creationId xmlns:p14="http://schemas.microsoft.com/office/powerpoint/2010/main" val="3463894643"/>
+      </p:ext>
+    </p:extLst>
+  </p:cSld>
+  <p:clrMapOvr>
+    <a:masterClrMapping/>
+  </p:clrMapOvr>
+</p:sld>
+</file>
+
+<file path=ppt/slides/slide8.xml><?xml version="1.0" encoding="utf-8"?>
+<p:sld xmlns:a="http://schemas.openxmlformats.org/drawingml/2006/main" xmlns:r="http://schemas.openxmlformats.org/officeDocument/2006/relationships" xmlns:p="http://schemas.openxmlformats.org/presentationml/2006/main">
+  <p:cSld>
+    <p:spTree>
+      <p:nvGrpSpPr>
+        <p:cNvPr id="1" name="">
+          <a:extLst>
+            <a:ext uri="{FF2B5EF4-FFF2-40B4-BE49-F238E27FC236}">
+              <a16:creationId xmlns:a16="http://schemas.microsoft.com/office/drawing/2014/main" id="{0B26019D-91D6-A2D8-25B8-CCE4EDA5B636}"/>
+            </a:ext>
+          </a:extLst>
+        </p:cNvPr>
+        <p:cNvGrpSpPr/>
+        <p:nvPr/>
+      </p:nvGrpSpPr>
+      <p:grpSpPr>
+        <a:xfrm>
+          <a:off x="0" y="0"/>
+          <a:ext cx="0" cy="0"/>
+          <a:chOff x="0" y="0"/>
+          <a:chExt cx="0" cy="0"/>
+        </a:xfrm>
+      </p:grpSpPr>
+    </p:spTree>
+    <p:extLst>
+      <p:ext uri="{BB962C8B-B14F-4D97-AF65-F5344CB8AC3E}">
+        <p14:creationId xmlns:p14="http://schemas.microsoft.com/office/powerpoint/2010/main" val="406539865"/>
       </p:ext>
     </p:extLst>
   </p:cSld>

--- a/intel_IP/IRIS/doc/軸向說明.pptx
+++ b/intel_IP/IRIS/doc/軸向說明.pptx
@@ -7,12 +7,13 @@
   <p:sldIdLst>
     <p:sldId id="256" r:id="rId2"/>
     <p:sldId id="257" r:id="rId3"/>
-    <p:sldId id="273" r:id="rId4"/>
-    <p:sldId id="279" r:id="rId5"/>
-    <p:sldId id="258" r:id="rId6"/>
-    <p:sldId id="259" r:id="rId7"/>
-    <p:sldId id="260" r:id="rId8"/>
-    <p:sldId id="261" r:id="rId9"/>
+    <p:sldId id="280" r:id="rId4"/>
+    <p:sldId id="273" r:id="rId5"/>
+    <p:sldId id="279" r:id="rId6"/>
+    <p:sldId id="258" r:id="rId7"/>
+    <p:sldId id="259" r:id="rId8"/>
+    <p:sldId id="260" r:id="rId9"/>
+    <p:sldId id="261" r:id="rId10"/>
   </p:sldIdLst>
   <p:sldSz cx="12192000" cy="6858000"/>
   <p:notesSz cx="6858000" cy="9144000"/>
@@ -4319,6 +4320,1025 @@
   <p:cSld>
     <p:spTree>
       <p:nvGrpSpPr>
+        <p:cNvPr id="1" name="">
+          <a:extLst>
+            <a:ext uri="{FF2B5EF4-FFF2-40B4-BE49-F238E27FC236}">
+              <a16:creationId xmlns:a16="http://schemas.microsoft.com/office/drawing/2014/main" id="{6E7FB038-789F-8E32-4D70-7B994D4244B1}"/>
+            </a:ext>
+          </a:extLst>
+        </p:cNvPr>
+        <p:cNvGrpSpPr/>
+        <p:nvPr/>
+      </p:nvGrpSpPr>
+      <p:grpSpPr>
+        <a:xfrm>
+          <a:off x="0" y="0"/>
+          <a:ext cx="0" cy="0"/>
+          <a:chOff x="0" y="0"/>
+          <a:chExt cx="0" cy="0"/>
+        </a:xfrm>
+      </p:grpSpPr>
+      <p:graphicFrame>
+        <p:nvGraphicFramePr>
+          <p:cNvPr id="4" name="表格 3">
+            <a:extLst>
+              <a:ext uri="{FF2B5EF4-FFF2-40B4-BE49-F238E27FC236}">
+                <a16:creationId xmlns:a16="http://schemas.microsoft.com/office/drawing/2014/main" id="{AE98FB9E-9E8F-087E-6995-F41A1ED824A1}"/>
+              </a:ext>
+            </a:extLst>
+          </p:cNvPr>
+          <p:cNvGraphicFramePr>
+            <a:graphicFrameLocks noGrp="1"/>
+          </p:cNvGraphicFramePr>
+          <p:nvPr>
+            <p:extLst>
+              <p:ext uri="{D42A27DB-BD31-4B8C-83A1-F6EECF244321}">
+                <p14:modId xmlns:p14="http://schemas.microsoft.com/office/powerpoint/2010/main" val="2771321557"/>
+              </p:ext>
+            </p:extLst>
+          </p:nvPr>
+        </p:nvGraphicFramePr>
+        <p:xfrm>
+          <a:off x="1385957" y="530822"/>
+          <a:ext cx="8128000" cy="4521200"/>
+        </p:xfrm>
+        <a:graphic>
+          <a:graphicData uri="http://schemas.openxmlformats.org/drawingml/2006/table">
+            <a:tbl>
+              <a:tblPr firstRow="1" bandRow="1">
+                <a:tableStyleId>{5940675A-B579-460E-94D1-54222C63F5DA}</a:tableStyleId>
+              </a:tblPr>
+              <a:tblGrid>
+                <a:gridCol w="2032000">
+                  <a:extLst>
+                    <a:ext uri="{9D8B030D-6E8A-4147-A177-3AD203B41FA5}">
+                      <a16:colId xmlns:a16="http://schemas.microsoft.com/office/drawing/2014/main" val="2835014394"/>
+                    </a:ext>
+                  </a:extLst>
+                </a:gridCol>
+                <a:gridCol w="2032000">
+                  <a:extLst>
+                    <a:ext uri="{9D8B030D-6E8A-4147-A177-3AD203B41FA5}">
+                      <a16:colId xmlns:a16="http://schemas.microsoft.com/office/drawing/2014/main" val="2041863558"/>
+                    </a:ext>
+                  </a:extLst>
+                </a:gridCol>
+                <a:gridCol w="2032000">
+                  <a:extLst>
+                    <a:ext uri="{9D8B030D-6E8A-4147-A177-3AD203B41FA5}">
+                      <a16:colId xmlns:a16="http://schemas.microsoft.com/office/drawing/2014/main" val="2560988731"/>
+                    </a:ext>
+                  </a:extLst>
+                </a:gridCol>
+                <a:gridCol w="2032000">
+                  <a:extLst>
+                    <a:ext uri="{9D8B030D-6E8A-4147-A177-3AD203B41FA5}">
+                      <a16:colId xmlns:a16="http://schemas.microsoft.com/office/drawing/2014/main" val="1114175466"/>
+                    </a:ext>
+                  </a:extLst>
+                </a:gridCol>
+              </a:tblGrid>
+              <a:tr h="370840">
+                <a:tc>
+                  <a:txBody>
+                    <a:bodyPr/>
+                    <a:lstStyle/>
+                    <a:p>
+                      <a:r>
+                        <a:rPr lang="en-US" altLang="zh-TW" sz="1400" dirty="0"/>
+                        <a:t>PD</a:t>
+                      </a:r>
+                      <a:r>
+                        <a:rPr lang="zh-TW" altLang="en-US" sz="1400" dirty="0"/>
+                        <a:t> 版</a:t>
+                      </a:r>
+                      <a:r>
+                        <a:rPr lang="en-US" altLang="zh-TW" sz="1400" dirty="0"/>
+                        <a:t> PD </a:t>
+                      </a:r>
+                      <a:r>
+                        <a:rPr lang="zh-TW" altLang="en-US" sz="1400" dirty="0"/>
+                        <a:t>編號</a:t>
+                      </a:r>
+                      <a:endParaRPr lang="en-US" altLang="zh-TW" sz="1400" dirty="0"/>
+                    </a:p>
+                  </a:txBody>
+                  <a:tcPr/>
+                </a:tc>
+                <a:tc>
+                  <a:txBody>
+                    <a:bodyPr/>
+                    <a:lstStyle/>
+                    <a:p>
+                      <a:r>
+                        <a:rPr lang="en-US" altLang="zh-TW" sz="1400" dirty="0">
+                          <a:highlight>
+                            <a:srgbClr val="FFFF00"/>
+                          </a:highlight>
+                        </a:rPr>
+                        <a:t>PD1</a:t>
+                      </a:r>
+                      <a:endParaRPr lang="zh-TW" altLang="en-US" sz="1400" dirty="0">
+                        <a:highlight>
+                          <a:srgbClr val="FFFF00"/>
+                        </a:highlight>
+                      </a:endParaRPr>
+                    </a:p>
+                  </a:txBody>
+                  <a:tcPr/>
+                </a:tc>
+                <a:tc>
+                  <a:txBody>
+                    <a:bodyPr/>
+                    <a:lstStyle/>
+                    <a:p>
+                      <a:r>
+                        <a:rPr lang="en-US" altLang="zh-TW" sz="1400" dirty="0">
+                          <a:highlight>
+                            <a:srgbClr val="FFFF00"/>
+                          </a:highlight>
+                        </a:rPr>
+                        <a:t>PD2</a:t>
+                      </a:r>
+                      <a:endParaRPr lang="zh-TW" altLang="en-US" sz="1400" dirty="0">
+                        <a:highlight>
+                          <a:srgbClr val="FFFF00"/>
+                        </a:highlight>
+                      </a:endParaRPr>
+                    </a:p>
+                  </a:txBody>
+                  <a:tcPr/>
+                </a:tc>
+                <a:tc>
+                  <a:txBody>
+                    <a:bodyPr/>
+                    <a:lstStyle/>
+                    <a:p>
+                      <a:r>
+                        <a:rPr lang="en-US" altLang="zh-TW" sz="1400" dirty="0">
+                          <a:highlight>
+                            <a:srgbClr val="FFFF00"/>
+                          </a:highlight>
+                        </a:rPr>
+                        <a:t>PD3</a:t>
+                      </a:r>
+                      <a:endParaRPr lang="zh-TW" altLang="en-US" sz="1400" dirty="0">
+                        <a:highlight>
+                          <a:srgbClr val="FFFF00"/>
+                        </a:highlight>
+                      </a:endParaRPr>
+                    </a:p>
+                  </a:txBody>
+                  <a:tcPr/>
+                </a:tc>
+                <a:extLst>
+                  <a:ext uri="{0D108BD9-81ED-4DB2-BD59-A6C34878D82A}">
+                    <a16:rowId xmlns:a16="http://schemas.microsoft.com/office/drawing/2014/main" val="1088471859"/>
+                  </a:ext>
+                </a:extLst>
+              </a:tr>
+              <a:tr h="370840">
+                <a:tc>
+                  <a:txBody>
+                    <a:bodyPr/>
+                    <a:lstStyle/>
+                    <a:p>
+                      <a:r>
+                        <a:rPr lang="en-US" altLang="zh-TW" sz="1400" dirty="0"/>
+                        <a:t>FPGA </a:t>
+                      </a:r>
+                      <a:r>
+                        <a:rPr lang="zh-TW" altLang="en-US" sz="1400" dirty="0"/>
+                        <a:t>對應軸向</a:t>
+                      </a:r>
+                      <a:endParaRPr lang="en-US" altLang="zh-TW" sz="1400" dirty="0"/>
+                    </a:p>
+                  </a:txBody>
+                  <a:tcPr/>
+                </a:tc>
+                <a:tc>
+                  <a:txBody>
+                    <a:bodyPr/>
+                    <a:lstStyle/>
+                    <a:p>
+                      <a:r>
+                        <a:rPr lang="en-US" altLang="zh-TW" sz="1400" dirty="0"/>
+                        <a:t>X</a:t>
+                      </a:r>
+                      <a:endParaRPr lang="zh-TW" altLang="en-US" sz="1400" dirty="0"/>
+                    </a:p>
+                  </a:txBody>
+                  <a:tcPr/>
+                </a:tc>
+                <a:tc>
+                  <a:txBody>
+                    <a:bodyPr/>
+                    <a:lstStyle/>
+                    <a:p>
+                      <a:r>
+                        <a:rPr lang="en-US" altLang="zh-TW" sz="1400" dirty="0"/>
+                        <a:t>Z</a:t>
+                      </a:r>
+                      <a:endParaRPr lang="zh-TW" altLang="en-US" sz="1400" dirty="0"/>
+                    </a:p>
+                  </a:txBody>
+                  <a:tcPr/>
+                </a:tc>
+                <a:tc>
+                  <a:txBody>
+                    <a:bodyPr/>
+                    <a:lstStyle/>
+                    <a:p>
+                      <a:r>
+                        <a:rPr lang="en-US" altLang="zh-TW" sz="1400" dirty="0"/>
+                        <a:t>Y</a:t>
+                      </a:r>
+                      <a:endParaRPr lang="zh-TW" altLang="en-US" sz="1400" dirty="0"/>
+                    </a:p>
+                  </a:txBody>
+                  <a:tcPr/>
+                </a:tc>
+                <a:extLst>
+                  <a:ext uri="{0D108BD9-81ED-4DB2-BD59-A6C34878D82A}">
+                    <a16:rowId xmlns:a16="http://schemas.microsoft.com/office/drawing/2014/main" val="234705323"/>
+                  </a:ext>
+                </a:extLst>
+              </a:tr>
+              <a:tr h="370840">
+                <a:tc>
+                  <a:txBody>
+                    <a:bodyPr/>
+                    <a:lstStyle/>
+                    <a:p>
+                      <a:pPr marL="0" marR="0" lvl="0" indent="0" algn="l" defTabSz="914400" rtl="0" eaLnBrk="1" fontAlgn="auto" latinLnBrk="0" hangingPunct="1">
+                        <a:lnSpc>
+                          <a:spcPct val="100000"/>
+                        </a:lnSpc>
+                        <a:spcBef>
+                          <a:spcPts val="0"/>
+                        </a:spcBef>
+                        <a:spcAft>
+                          <a:spcPts val="0"/>
+                        </a:spcAft>
+                        <a:buClrTx/>
+                        <a:buSzTx/>
+                        <a:buFontTx/>
+                        <a:buNone/>
+                        <a:tabLst/>
+                        <a:defRPr/>
+                      </a:pPr>
+                      <a:r>
+                        <a:rPr lang="en-US" altLang="zh-TW" sz="1400" dirty="0"/>
+                        <a:t>FPGA</a:t>
+                      </a:r>
+                      <a:r>
+                        <a:rPr lang="zh-TW" altLang="en-US" sz="1400" dirty="0"/>
+                        <a:t> 參數容器對應 </a:t>
+                      </a:r>
+                      <a:r>
+                        <a:rPr lang="en-US" altLang="zh-TW" sz="1400" dirty="0"/>
+                        <a:t>cmd </a:t>
+                      </a:r>
+                      <a:r>
+                        <a:rPr lang="zh-TW" altLang="en-US" sz="1400" dirty="0"/>
+                        <a:t>通道</a:t>
+                      </a:r>
+                    </a:p>
+                  </a:txBody>
+                  <a:tcPr/>
+                </a:tc>
+                <a:tc>
+                  <a:txBody>
+                    <a:bodyPr/>
+                    <a:lstStyle/>
+                    <a:p>
+                      <a:r>
+                        <a:rPr lang="en-US" altLang="zh-TW" sz="1400" dirty="0"/>
+                        <a:t>ch1</a:t>
+                      </a:r>
+                      <a:endParaRPr lang="zh-TW" altLang="en-US" sz="1400" dirty="0"/>
+                    </a:p>
+                  </a:txBody>
+                  <a:tcPr/>
+                </a:tc>
+                <a:tc>
+                  <a:txBody>
+                    <a:bodyPr/>
+                    <a:lstStyle/>
+                    <a:p>
+                      <a:r>
+                        <a:rPr lang="en-US" altLang="zh-TW" sz="1400" dirty="0"/>
+                        <a:t>ch3</a:t>
+                      </a:r>
+                      <a:endParaRPr lang="zh-TW" altLang="en-US" sz="1400" dirty="0"/>
+                    </a:p>
+                  </a:txBody>
+                  <a:tcPr/>
+                </a:tc>
+                <a:tc>
+                  <a:txBody>
+                    <a:bodyPr/>
+                    <a:lstStyle/>
+                    <a:p>
+                      <a:r>
+                        <a:rPr lang="en-US" altLang="zh-TW" sz="1400" dirty="0"/>
+                        <a:t>ch2</a:t>
+                      </a:r>
+                      <a:endParaRPr lang="zh-TW" altLang="en-US" sz="1400" dirty="0"/>
+                    </a:p>
+                  </a:txBody>
+                  <a:tcPr/>
+                </a:tc>
+                <a:extLst>
+                  <a:ext uri="{0D108BD9-81ED-4DB2-BD59-A6C34878D82A}">
+                    <a16:rowId xmlns:a16="http://schemas.microsoft.com/office/drawing/2014/main" val="2009813523"/>
+                  </a:ext>
+                </a:extLst>
+              </a:tr>
+              <a:tr h="370840">
+                <a:tc>
+                  <a:txBody>
+                    <a:bodyPr/>
+                    <a:lstStyle/>
+                    <a:p>
+                      <a:pPr marL="0" marR="0" lvl="0" indent="0" algn="l" defTabSz="914400" rtl="0" eaLnBrk="1" fontAlgn="auto" latinLnBrk="0" hangingPunct="1">
+                        <a:lnSpc>
+                          <a:spcPct val="100000"/>
+                        </a:lnSpc>
+                        <a:spcBef>
+                          <a:spcPts val="0"/>
+                        </a:spcBef>
+                        <a:spcAft>
+                          <a:spcPts val="0"/>
+                        </a:spcAft>
+                        <a:buClrTx/>
+                        <a:buSzTx/>
+                        <a:buFontTx/>
+                        <a:buNone/>
+                        <a:tabLst/>
+                        <a:defRPr/>
+                      </a:pPr>
+                      <a:r>
+                        <a:rPr lang="zh-TW" altLang="en-US" sz="1400" dirty="0"/>
+                        <a:t>對應</a:t>
+                      </a:r>
+                      <a:r>
+                        <a:rPr lang="en-US" altLang="zh-TW" sz="1400" dirty="0"/>
+                        <a:t>ADC</a:t>
+                      </a:r>
+                      <a:endParaRPr lang="zh-TW" altLang="en-US" sz="1400" dirty="0"/>
+                    </a:p>
+                  </a:txBody>
+                  <a:tcPr/>
+                </a:tc>
+                <a:tc>
+                  <a:txBody>
+                    <a:bodyPr/>
+                    <a:lstStyle/>
+                    <a:p>
+                      <a:r>
+                        <a:rPr lang="en-US" altLang="zh-TW" sz="1400" dirty="0"/>
+                        <a:t>ADC_1_1</a:t>
+                      </a:r>
+                      <a:endParaRPr lang="zh-TW" altLang="en-US" sz="1400" dirty="0"/>
+                    </a:p>
+                  </a:txBody>
+                  <a:tcPr/>
+                </a:tc>
+                <a:tc>
+                  <a:txBody>
+                    <a:bodyPr/>
+                    <a:lstStyle/>
+                    <a:p>
+                      <a:r>
+                        <a:rPr lang="en-US" altLang="zh-TW" sz="1400" dirty="0"/>
+                        <a:t>ADC_2_2</a:t>
+                      </a:r>
+                      <a:endParaRPr lang="zh-TW" altLang="en-US" sz="1400" dirty="0"/>
+                    </a:p>
+                  </a:txBody>
+                  <a:tcPr/>
+                </a:tc>
+                <a:tc>
+                  <a:txBody>
+                    <a:bodyPr/>
+                    <a:lstStyle/>
+                    <a:p>
+                      <a:r>
+                        <a:rPr lang="en-US" altLang="zh-TW" sz="1400" dirty="0"/>
+                        <a:t>ADC_2_1</a:t>
+                      </a:r>
+                      <a:endParaRPr lang="zh-TW" altLang="en-US" sz="1400" dirty="0"/>
+                    </a:p>
+                  </a:txBody>
+                  <a:tcPr/>
+                </a:tc>
+                <a:extLst>
+                  <a:ext uri="{0D108BD9-81ED-4DB2-BD59-A6C34878D82A}">
+                    <a16:rowId xmlns:a16="http://schemas.microsoft.com/office/drawing/2014/main" val="2435068180"/>
+                  </a:ext>
+                </a:extLst>
+              </a:tr>
+              <a:tr h="370840">
+                <a:tc>
+                  <a:txBody>
+                    <a:bodyPr/>
+                    <a:lstStyle/>
+                    <a:p>
+                      <a:pPr marL="0" marR="0" lvl="0" indent="0" algn="l" defTabSz="914400" rtl="0" eaLnBrk="1" fontAlgn="auto" latinLnBrk="0" hangingPunct="1">
+                        <a:lnSpc>
+                          <a:spcPct val="100000"/>
+                        </a:lnSpc>
+                        <a:spcBef>
+                          <a:spcPts val="0"/>
+                        </a:spcBef>
+                        <a:spcAft>
+                          <a:spcPts val="0"/>
+                        </a:spcAft>
+                        <a:buClrTx/>
+                        <a:buSzTx/>
+                        <a:buFontTx/>
+                        <a:buNone/>
+                        <a:tabLst/>
+                        <a:defRPr/>
+                      </a:pPr>
+                      <a:r>
+                        <a:rPr lang="en-US" altLang="zh-TW" sz="1400" dirty="0"/>
+                        <a:t>FPGA</a:t>
+                      </a:r>
+                      <a:r>
+                        <a:rPr lang="zh-TW" altLang="en-US" sz="1400" dirty="0"/>
+                        <a:t> 命名</a:t>
+                      </a:r>
+                    </a:p>
+                  </a:txBody>
+                  <a:tcPr/>
+                </a:tc>
+                <a:tc>
+                  <a:txBody>
+                    <a:bodyPr/>
+                    <a:lstStyle/>
+                    <a:p>
+                      <a:r>
+                        <a:rPr lang="en-US" altLang="zh-TW" sz="1400" dirty="0"/>
+                        <a:t>ADC1</a:t>
+                      </a:r>
+                      <a:endParaRPr lang="zh-TW" altLang="en-US" sz="1400" dirty="0"/>
+                    </a:p>
+                  </a:txBody>
+                  <a:tcPr/>
+                </a:tc>
+                <a:tc>
+                  <a:txBody>
+                    <a:bodyPr/>
+                    <a:lstStyle/>
+                    <a:p>
+                      <a:r>
+                        <a:rPr lang="en-US" altLang="zh-TW" sz="1400" dirty="0"/>
+                        <a:t>ADC2</a:t>
+                      </a:r>
+                      <a:endParaRPr lang="zh-TW" altLang="en-US" sz="1400" dirty="0"/>
+                    </a:p>
+                  </a:txBody>
+                  <a:tcPr/>
+                </a:tc>
+                <a:tc>
+                  <a:txBody>
+                    <a:bodyPr/>
+                    <a:lstStyle/>
+                    <a:p>
+                      <a:r>
+                        <a:rPr lang="en-US" altLang="zh-TW" sz="1400" dirty="0"/>
+                        <a:t>ADC3</a:t>
+                      </a:r>
+                      <a:endParaRPr lang="zh-TW" altLang="en-US" sz="1400" dirty="0"/>
+                    </a:p>
+                  </a:txBody>
+                  <a:tcPr/>
+                </a:tc>
+                <a:extLst>
+                  <a:ext uri="{0D108BD9-81ED-4DB2-BD59-A6C34878D82A}">
+                    <a16:rowId xmlns:a16="http://schemas.microsoft.com/office/drawing/2014/main" val="1601002324"/>
+                  </a:ext>
+                </a:extLst>
+              </a:tr>
+              <a:tr h="370840">
+                <a:tc>
+                  <a:txBody>
+                    <a:bodyPr/>
+                    <a:lstStyle/>
+                    <a:p>
+                      <a:pPr marL="0" marR="0" lvl="0" indent="0" algn="l" defTabSz="914400" rtl="0" eaLnBrk="1" fontAlgn="auto" latinLnBrk="0" hangingPunct="1">
+                        <a:lnSpc>
+                          <a:spcPct val="100000"/>
+                        </a:lnSpc>
+                        <a:spcBef>
+                          <a:spcPts val="0"/>
+                        </a:spcBef>
+                        <a:spcAft>
+                          <a:spcPts val="0"/>
+                        </a:spcAft>
+                        <a:buClrTx/>
+                        <a:buSzTx/>
+                        <a:buFontTx/>
+                        <a:buNone/>
+                        <a:tabLst/>
+                        <a:defRPr/>
+                      </a:pPr>
+                      <a:r>
+                        <a:rPr lang="zh-TW" altLang="en-US" sz="1400" dirty="0"/>
+                        <a:t>對應</a:t>
+                      </a:r>
+                      <a:r>
+                        <a:rPr lang="en-US" altLang="zh-TW" sz="1400" dirty="0"/>
+                        <a:t>DAC</a:t>
+                      </a:r>
+                      <a:endParaRPr lang="zh-TW" altLang="en-US" sz="1400" dirty="0"/>
+                    </a:p>
+                  </a:txBody>
+                  <a:tcPr/>
+                </a:tc>
+                <a:tc>
+                  <a:txBody>
+                    <a:bodyPr/>
+                    <a:lstStyle/>
+                    <a:p>
+                      <a:r>
+                        <a:rPr lang="en-US" altLang="zh-TW" sz="1400" dirty="0"/>
+                        <a:t>DAC_1_1</a:t>
+                      </a:r>
+                      <a:endParaRPr lang="zh-TW" altLang="en-US" sz="1400" dirty="0"/>
+                    </a:p>
+                  </a:txBody>
+                  <a:tcPr/>
+                </a:tc>
+                <a:tc>
+                  <a:txBody>
+                    <a:bodyPr/>
+                    <a:lstStyle/>
+                    <a:p>
+                      <a:pPr marL="0" marR="0" lvl="0" indent="0" algn="l" defTabSz="914400" rtl="0" eaLnBrk="1" fontAlgn="auto" latinLnBrk="0" hangingPunct="1">
+                        <a:lnSpc>
+                          <a:spcPct val="100000"/>
+                        </a:lnSpc>
+                        <a:spcBef>
+                          <a:spcPts val="0"/>
+                        </a:spcBef>
+                        <a:spcAft>
+                          <a:spcPts val="0"/>
+                        </a:spcAft>
+                        <a:buClrTx/>
+                        <a:buSzTx/>
+                        <a:buFontTx/>
+                        <a:buNone/>
+                        <a:tabLst/>
+                        <a:defRPr/>
+                      </a:pPr>
+                      <a:r>
+                        <a:rPr lang="en-US" altLang="zh-TW" sz="1400" dirty="0"/>
+                        <a:t>DAC_2_2</a:t>
+                      </a:r>
+                      <a:endParaRPr lang="zh-TW" altLang="en-US" sz="1400" dirty="0"/>
+                    </a:p>
+                  </a:txBody>
+                  <a:tcPr/>
+                </a:tc>
+                <a:tc>
+                  <a:txBody>
+                    <a:bodyPr/>
+                    <a:lstStyle/>
+                    <a:p>
+                      <a:pPr marL="0" marR="0" lvl="0" indent="0" algn="l" defTabSz="914400" rtl="0" eaLnBrk="1" fontAlgn="auto" latinLnBrk="0" hangingPunct="1">
+                        <a:lnSpc>
+                          <a:spcPct val="100000"/>
+                        </a:lnSpc>
+                        <a:spcBef>
+                          <a:spcPts val="0"/>
+                        </a:spcBef>
+                        <a:spcAft>
+                          <a:spcPts val="0"/>
+                        </a:spcAft>
+                        <a:buClrTx/>
+                        <a:buSzTx/>
+                        <a:buFontTx/>
+                        <a:buNone/>
+                        <a:tabLst/>
+                        <a:defRPr/>
+                      </a:pPr>
+                      <a:r>
+                        <a:rPr lang="en-US" altLang="zh-TW" sz="1400" dirty="0"/>
+                        <a:t>DAC_2_1</a:t>
+                      </a:r>
+                      <a:endParaRPr lang="zh-TW" altLang="en-US" sz="1400" dirty="0"/>
+                    </a:p>
+                  </a:txBody>
+                  <a:tcPr/>
+                </a:tc>
+                <a:extLst>
+                  <a:ext uri="{0D108BD9-81ED-4DB2-BD59-A6C34878D82A}">
+                    <a16:rowId xmlns:a16="http://schemas.microsoft.com/office/drawing/2014/main" val="1438486160"/>
+                  </a:ext>
+                </a:extLst>
+              </a:tr>
+              <a:tr h="370840">
+                <a:tc>
+                  <a:txBody>
+                    <a:bodyPr/>
+                    <a:lstStyle/>
+                    <a:p>
+                      <a:pPr marL="0" marR="0" lvl="0" indent="0" algn="l" defTabSz="914400" rtl="0" eaLnBrk="1" fontAlgn="auto" latinLnBrk="0" hangingPunct="1">
+                        <a:lnSpc>
+                          <a:spcPct val="100000"/>
+                        </a:lnSpc>
+                        <a:spcBef>
+                          <a:spcPts val="0"/>
+                        </a:spcBef>
+                        <a:spcAft>
+                          <a:spcPts val="0"/>
+                        </a:spcAft>
+                        <a:buClrTx/>
+                        <a:buSzTx/>
+                        <a:buFontTx/>
+                        <a:buNone/>
+                        <a:tabLst/>
+                        <a:defRPr/>
+                      </a:pPr>
+                      <a:r>
+                        <a:rPr lang="en-US" altLang="zh-TW" sz="1400" dirty="0"/>
+                        <a:t>FPGA </a:t>
+                      </a:r>
+                      <a:r>
+                        <a:rPr lang="zh-TW" altLang="en-US" sz="1400" dirty="0"/>
+                        <a:t>變數</a:t>
+                      </a:r>
+                    </a:p>
+                  </a:txBody>
+                  <a:tcPr/>
+                </a:tc>
+                <a:tc>
+                  <a:txBody>
+                    <a:bodyPr/>
+                    <a:lstStyle/>
+                    <a:p>
+                      <a:r>
+                        <a:rPr lang="en-US" altLang="zh-TW" sz="1400" dirty="0"/>
+                        <a:t>o_step_1</a:t>
+                      </a:r>
+                      <a:endParaRPr lang="zh-TW" altLang="en-US" sz="1400" dirty="0"/>
+                    </a:p>
+                  </a:txBody>
+                  <a:tcPr/>
+                </a:tc>
+                <a:tc>
+                  <a:txBody>
+                    <a:bodyPr/>
+                    <a:lstStyle/>
+                    <a:p>
+                      <a:r>
+                        <a:rPr lang="en-US" altLang="zh-TW" sz="1400" dirty="0"/>
+                        <a:t>o_step_3</a:t>
+                      </a:r>
+                      <a:endParaRPr lang="zh-TW" altLang="en-US" sz="1400" dirty="0"/>
+                    </a:p>
+                  </a:txBody>
+                  <a:tcPr/>
+                </a:tc>
+                <a:tc>
+                  <a:txBody>
+                    <a:bodyPr/>
+                    <a:lstStyle/>
+                    <a:p>
+                      <a:r>
+                        <a:rPr lang="en-US" altLang="zh-TW" sz="1400" dirty="0"/>
+                        <a:t>o_step_2</a:t>
+                      </a:r>
+                      <a:endParaRPr lang="zh-TW" altLang="en-US" sz="1400" dirty="0"/>
+                    </a:p>
+                  </a:txBody>
+                  <a:tcPr/>
+                </a:tc>
+                <a:extLst>
+                  <a:ext uri="{0D108BD9-81ED-4DB2-BD59-A6C34878D82A}">
+                    <a16:rowId xmlns:a16="http://schemas.microsoft.com/office/drawing/2014/main" val="1311851592"/>
+                  </a:ext>
+                </a:extLst>
+              </a:tr>
+              <a:tr h="370840">
+                <a:tc>
+                  <a:txBody>
+                    <a:bodyPr/>
+                    <a:lstStyle/>
+                    <a:p>
+                      <a:pPr marL="0" marR="0" lvl="0" indent="0" algn="l" defTabSz="914400" rtl="0" eaLnBrk="1" fontAlgn="auto" latinLnBrk="0" hangingPunct="1">
+                        <a:lnSpc>
+                          <a:spcPct val="100000"/>
+                        </a:lnSpc>
+                        <a:spcBef>
+                          <a:spcPts val="0"/>
+                        </a:spcBef>
+                        <a:spcAft>
+                          <a:spcPts val="0"/>
+                        </a:spcAft>
+                        <a:buClrTx/>
+                        <a:buSzTx/>
+                        <a:buFontTx/>
+                        <a:buNone/>
+                        <a:tabLst/>
+                        <a:defRPr/>
+                      </a:pPr>
+                      <a:r>
+                        <a:rPr lang="en-US" altLang="zh-TW" sz="1400" dirty="0"/>
+                        <a:t>Sensor </a:t>
+                      </a:r>
+                      <a:r>
+                        <a:rPr lang="zh-TW" altLang="en-US" sz="1400" dirty="0"/>
+                        <a:t>板命名</a:t>
+                      </a:r>
+                    </a:p>
+                  </a:txBody>
+                  <a:tcPr/>
+                </a:tc>
+                <a:tc>
+                  <a:txBody>
+                    <a:bodyPr/>
+                    <a:lstStyle/>
+                    <a:p>
+                      <a:r>
+                        <a:rPr lang="en-US" altLang="zh-TW" sz="1400" dirty="0">
+                          <a:highlight>
+                            <a:srgbClr val="FFFF00"/>
+                          </a:highlight>
+                        </a:rPr>
+                        <a:t>DAC1</a:t>
+                      </a:r>
+                      <a:endParaRPr lang="zh-TW" altLang="en-US" sz="1400" dirty="0">
+                        <a:highlight>
+                          <a:srgbClr val="FFFF00"/>
+                        </a:highlight>
+                      </a:endParaRPr>
+                    </a:p>
+                  </a:txBody>
+                  <a:tcPr/>
+                </a:tc>
+                <a:tc>
+                  <a:txBody>
+                    <a:bodyPr/>
+                    <a:lstStyle/>
+                    <a:p>
+                      <a:r>
+                        <a:rPr lang="en-US" altLang="zh-TW" sz="1400" dirty="0">
+                          <a:highlight>
+                            <a:srgbClr val="FFFF00"/>
+                          </a:highlight>
+                        </a:rPr>
+                        <a:t>DAC3</a:t>
+                      </a:r>
+                      <a:endParaRPr lang="zh-TW" altLang="en-US" sz="1400" dirty="0">
+                        <a:highlight>
+                          <a:srgbClr val="FFFF00"/>
+                        </a:highlight>
+                      </a:endParaRPr>
+                    </a:p>
+                  </a:txBody>
+                  <a:tcPr/>
+                </a:tc>
+                <a:tc>
+                  <a:txBody>
+                    <a:bodyPr/>
+                    <a:lstStyle/>
+                    <a:p>
+                      <a:r>
+                        <a:rPr lang="en-US" altLang="zh-TW" sz="1400" dirty="0">
+                          <a:highlight>
+                            <a:srgbClr val="FFFF00"/>
+                          </a:highlight>
+                        </a:rPr>
+                        <a:t>DAC2</a:t>
+                      </a:r>
+                      <a:endParaRPr lang="zh-TW" altLang="en-US" sz="1400" dirty="0">
+                        <a:highlight>
+                          <a:srgbClr val="FFFF00"/>
+                        </a:highlight>
+                      </a:endParaRPr>
+                    </a:p>
+                  </a:txBody>
+                  <a:tcPr/>
+                </a:tc>
+                <a:extLst>
+                  <a:ext uri="{0D108BD9-81ED-4DB2-BD59-A6C34878D82A}">
+                    <a16:rowId xmlns:a16="http://schemas.microsoft.com/office/drawing/2014/main" val="2229813547"/>
+                  </a:ext>
+                </a:extLst>
+              </a:tr>
+              <a:tr h="370840">
+                <a:tc>
+                  <a:txBody>
+                    <a:bodyPr/>
+                    <a:lstStyle/>
+                    <a:p>
+                      <a:r>
+                        <a:rPr lang="en-US" altLang="zh-TW" sz="1400" dirty="0"/>
+                        <a:t>Mis-alignment </a:t>
+                      </a:r>
+                      <a:r>
+                        <a:rPr lang="zh-TW" altLang="en-US" sz="1400" dirty="0"/>
+                        <a:t>參數對應通道</a:t>
+                      </a:r>
+                    </a:p>
+                  </a:txBody>
+                  <a:tcPr/>
+                </a:tc>
+                <a:tc gridSpan="3">
+                  <a:txBody>
+                    <a:bodyPr/>
+                    <a:lstStyle/>
+                    <a:p>
+                      <a:pPr algn="ctr"/>
+                      <a:r>
+                        <a:rPr lang="en-US" altLang="zh-TW" sz="1400" dirty="0"/>
+                        <a:t>ch4</a:t>
+                      </a:r>
+                      <a:endParaRPr lang="zh-TW" altLang="en-US" sz="1400" dirty="0"/>
+                    </a:p>
+                  </a:txBody>
+                  <a:tcPr/>
+                </a:tc>
+                <a:tc hMerge="1">
+                  <a:txBody>
+                    <a:bodyPr/>
+                    <a:lstStyle/>
+                    <a:p>
+                      <a:endParaRPr lang="zh-TW" altLang="en-US" sz="1400"/>
+                    </a:p>
+                  </a:txBody>
+                  <a:tcPr/>
+                </a:tc>
+                <a:tc hMerge="1">
+                  <a:txBody>
+                    <a:bodyPr/>
+                    <a:lstStyle/>
+                    <a:p>
+                      <a:endParaRPr lang="zh-TW" altLang="en-US" sz="1400" dirty="0"/>
+                    </a:p>
+                  </a:txBody>
+                  <a:tcPr/>
+                </a:tc>
+                <a:extLst>
+                  <a:ext uri="{0D108BD9-81ED-4DB2-BD59-A6C34878D82A}">
+                    <a16:rowId xmlns:a16="http://schemas.microsoft.com/office/drawing/2014/main" val="1219640177"/>
+                  </a:ext>
+                </a:extLst>
+              </a:tr>
+              <a:tr h="370840">
+                <a:tc>
+                  <a:txBody>
+                    <a:bodyPr/>
+                    <a:lstStyle/>
+                    <a:p>
+                      <a:r>
+                        <a:rPr lang="zh-TW" altLang="en-US" sz="1400" dirty="0"/>
+                        <a:t>實際安裝軸向</a:t>
+                      </a:r>
+                    </a:p>
+                  </a:txBody>
+                  <a:tcPr/>
+                </a:tc>
+                <a:tc>
+                  <a:txBody>
+                    <a:bodyPr/>
+                    <a:lstStyle/>
+                    <a:p>
+                      <a:r>
+                        <a:rPr lang="en-US" altLang="zh-TW" sz="1400" dirty="0"/>
+                        <a:t>Z</a:t>
+                      </a:r>
+                      <a:endParaRPr lang="zh-TW" altLang="en-US" sz="1400" dirty="0"/>
+                    </a:p>
+                  </a:txBody>
+                  <a:tcPr/>
+                </a:tc>
+                <a:tc>
+                  <a:txBody>
+                    <a:bodyPr/>
+                    <a:lstStyle/>
+                    <a:p>
+                      <a:r>
+                        <a:rPr lang="en-US" altLang="zh-TW" sz="1400" dirty="0"/>
+                        <a:t>X</a:t>
+                      </a:r>
+                      <a:endParaRPr lang="zh-TW" altLang="en-US" sz="1400" dirty="0"/>
+                    </a:p>
+                  </a:txBody>
+                  <a:tcPr/>
+                </a:tc>
+                <a:tc>
+                  <a:txBody>
+                    <a:bodyPr/>
+                    <a:lstStyle/>
+                    <a:p>
+                      <a:r>
+                        <a:rPr lang="en-US" altLang="zh-TW" sz="1400" dirty="0"/>
+                        <a:t>Y</a:t>
+                      </a:r>
+                      <a:endParaRPr lang="zh-TW" altLang="en-US" sz="1400" dirty="0"/>
+                    </a:p>
+                  </a:txBody>
+                  <a:tcPr/>
+                </a:tc>
+                <a:extLst>
+                  <a:ext uri="{0D108BD9-81ED-4DB2-BD59-A6C34878D82A}">
+                    <a16:rowId xmlns:a16="http://schemas.microsoft.com/office/drawing/2014/main" val="3255864856"/>
+                  </a:ext>
+                </a:extLst>
+              </a:tr>
+              <a:tr h="370840">
+                <a:tc>
+                  <a:txBody>
+                    <a:bodyPr/>
+                    <a:lstStyle/>
+                    <a:p>
+                      <a:r>
+                        <a:rPr lang="en-US" altLang="zh-TW" sz="1400" dirty="0"/>
+                        <a:t>Dump fog </a:t>
+                      </a:r>
+                      <a:r>
+                        <a:rPr lang="zh-TW" altLang="en-US" sz="1400" dirty="0"/>
+                        <a:t>參數時送出通道</a:t>
+                      </a:r>
+                    </a:p>
+                  </a:txBody>
+                  <a:tcPr/>
+                </a:tc>
+                <a:tc>
+                  <a:txBody>
+                    <a:bodyPr/>
+                    <a:lstStyle/>
+                    <a:p>
+                      <a:r>
+                        <a:rPr lang="en-US" altLang="zh-TW" sz="1400" dirty="0"/>
+                        <a:t>ch1</a:t>
+                      </a:r>
+                      <a:endParaRPr lang="zh-TW" altLang="en-US" sz="1400" dirty="0"/>
+                    </a:p>
+                  </a:txBody>
+                  <a:tcPr/>
+                </a:tc>
+                <a:tc>
+                  <a:txBody>
+                    <a:bodyPr/>
+                    <a:lstStyle/>
+                    <a:p>
+                      <a:r>
+                        <a:rPr lang="en-US" altLang="zh-TW" sz="1400" dirty="0"/>
+                        <a:t>ch3</a:t>
+                      </a:r>
+                      <a:endParaRPr lang="zh-TW" altLang="en-US" sz="1400" dirty="0"/>
+                    </a:p>
+                  </a:txBody>
+                  <a:tcPr/>
+                </a:tc>
+                <a:tc>
+                  <a:txBody>
+                    <a:bodyPr/>
+                    <a:lstStyle/>
+                    <a:p>
+                      <a:r>
+                        <a:rPr lang="en-US" altLang="zh-TW" sz="1400" dirty="0"/>
+                        <a:t>ch2</a:t>
+                      </a:r>
+                      <a:endParaRPr lang="zh-TW" altLang="en-US" sz="1400" dirty="0"/>
+                    </a:p>
+                  </a:txBody>
+                  <a:tcPr/>
+                </a:tc>
+                <a:extLst>
+                  <a:ext uri="{0D108BD9-81ED-4DB2-BD59-A6C34878D82A}">
+                    <a16:rowId xmlns:a16="http://schemas.microsoft.com/office/drawing/2014/main" val="4057009047"/>
+                  </a:ext>
+                </a:extLst>
+              </a:tr>
+            </a:tbl>
+          </a:graphicData>
+        </a:graphic>
+      </p:graphicFrame>
+    </p:spTree>
+    <p:extLst>
+      <p:ext uri="{BB962C8B-B14F-4D97-AF65-F5344CB8AC3E}">
+        <p14:creationId xmlns:p14="http://schemas.microsoft.com/office/powerpoint/2010/main" val="2260224663"/>
+      </p:ext>
+    </p:extLst>
+  </p:cSld>
+  <p:clrMapOvr>
+    <a:masterClrMapping/>
+  </p:clrMapOvr>
+</p:sld>
+</file>
+
+<file path=ppt/slides/slide4.xml><?xml version="1.0" encoding="utf-8"?>
+<p:sld xmlns:a="http://schemas.openxmlformats.org/drawingml/2006/main" xmlns:r="http://schemas.openxmlformats.org/officeDocument/2006/relationships" xmlns:p="http://schemas.openxmlformats.org/presentationml/2006/main">
+  <p:cSld>
+    <p:spTree>
+      <p:nvGrpSpPr>
         <p:cNvPr id="1" name=""/>
         <p:cNvGrpSpPr/>
         <p:nvPr/>
@@ -5581,7 +6601,7 @@
 </p:sld>
 </file>
 
-<file path=ppt/slides/slide4.xml><?xml version="1.0" encoding="utf-8"?>
+<file path=ppt/slides/slide5.xml><?xml version="1.0" encoding="utf-8"?>
 <p:sld xmlns:a="http://schemas.openxmlformats.org/drawingml/2006/main" xmlns:r="http://schemas.openxmlformats.org/officeDocument/2006/relationships" xmlns:p="http://schemas.openxmlformats.org/presentationml/2006/main">
   <p:cSld>
     <p:spTree>
@@ -5793,7 +6813,7 @@
 </p:sld>
 </file>
 
-<file path=ppt/slides/slide5.xml><?xml version="1.0" encoding="utf-8"?>
+<file path=ppt/slides/slide6.xml><?xml version="1.0" encoding="utf-8"?>
 <p:sld xmlns:a="http://schemas.openxmlformats.org/drawingml/2006/main" xmlns:r="http://schemas.openxmlformats.org/officeDocument/2006/relationships" xmlns:p="http://schemas.openxmlformats.org/presentationml/2006/main">
   <p:cSld>
     <p:spTree>
@@ -6065,7 +7085,7 @@
 </p:sld>
 </file>
 
-<file path=ppt/slides/slide6.xml><?xml version="1.0" encoding="utf-8"?>
+<file path=ppt/slides/slide7.xml><?xml version="1.0" encoding="utf-8"?>
 <p:sld xmlns:a="http://schemas.openxmlformats.org/drawingml/2006/main" xmlns:r="http://schemas.openxmlformats.org/officeDocument/2006/relationships" xmlns:p="http://schemas.openxmlformats.org/presentationml/2006/main">
   <p:cSld>
     <p:spTree>
@@ -6665,7 +7685,7 @@
 </p:sld>
 </file>
 
-<file path=ppt/slides/slide7.xml><?xml version="1.0" encoding="utf-8"?>
+<file path=ppt/slides/slide8.xml><?xml version="1.0" encoding="utf-8"?>
 <p:sld xmlns:a="http://schemas.openxmlformats.org/drawingml/2006/main" xmlns:r="http://schemas.openxmlformats.org/officeDocument/2006/relationships" xmlns:p="http://schemas.openxmlformats.org/presentationml/2006/main">
   <p:cSld>
     <p:spTree>
@@ -6824,7 +7844,7 @@
 </p:sld>
 </file>
 
-<file path=ppt/slides/slide8.xml><?xml version="1.0" encoding="utf-8"?>
+<file path=ppt/slides/slide9.xml><?xml version="1.0" encoding="utf-8"?>
 <p:sld xmlns:a="http://schemas.openxmlformats.org/drawingml/2006/main" xmlns:r="http://schemas.openxmlformats.org/officeDocument/2006/relationships" xmlns:p="http://schemas.openxmlformats.org/presentationml/2006/main">
   <p:cSld>
     <p:spTree>

--- a/intel_IP/IRIS/doc/軸向說明.pptx
+++ b/intel_IP/IRIS/doc/軸向說明.pptx
@@ -267,7 +267,7 @@
           <a:p>
             <a:fld id="{C6DC6E88-8268-41DF-AB70-3C6FB3488E03}" type="datetimeFigureOut">
               <a:rPr lang="zh-TW" altLang="en-US" smtClean="0"/>
-              <a:t>2026/4/22</a:t>
+              <a:t>2026/4/23</a:t>
             </a:fld>
             <a:endParaRPr lang="zh-TW" altLang="en-US"/>
           </a:p>
@@ -465,7 +465,7 @@
           <a:p>
             <a:fld id="{C6DC6E88-8268-41DF-AB70-3C6FB3488E03}" type="datetimeFigureOut">
               <a:rPr lang="zh-TW" altLang="en-US" smtClean="0"/>
-              <a:t>2026/4/22</a:t>
+              <a:t>2026/4/23</a:t>
             </a:fld>
             <a:endParaRPr lang="zh-TW" altLang="en-US"/>
           </a:p>
@@ -673,7 +673,7 @@
           <a:p>
             <a:fld id="{C6DC6E88-8268-41DF-AB70-3C6FB3488E03}" type="datetimeFigureOut">
               <a:rPr lang="zh-TW" altLang="en-US" smtClean="0"/>
-              <a:t>2026/4/22</a:t>
+              <a:t>2026/4/23</a:t>
             </a:fld>
             <a:endParaRPr lang="zh-TW" altLang="en-US"/>
           </a:p>
@@ -871,7 +871,7 @@
           <a:p>
             <a:fld id="{C6DC6E88-8268-41DF-AB70-3C6FB3488E03}" type="datetimeFigureOut">
               <a:rPr lang="zh-TW" altLang="en-US" smtClean="0"/>
-              <a:t>2026/4/22</a:t>
+              <a:t>2026/4/23</a:t>
             </a:fld>
             <a:endParaRPr lang="zh-TW" altLang="en-US"/>
           </a:p>
@@ -1146,7 +1146,7 @@
           <a:p>
             <a:fld id="{C6DC6E88-8268-41DF-AB70-3C6FB3488E03}" type="datetimeFigureOut">
               <a:rPr lang="zh-TW" altLang="en-US" smtClean="0"/>
-              <a:t>2026/4/22</a:t>
+              <a:t>2026/4/23</a:t>
             </a:fld>
             <a:endParaRPr lang="zh-TW" altLang="en-US"/>
           </a:p>
@@ -1411,7 +1411,7 @@
           <a:p>
             <a:fld id="{C6DC6E88-8268-41DF-AB70-3C6FB3488E03}" type="datetimeFigureOut">
               <a:rPr lang="zh-TW" altLang="en-US" smtClean="0"/>
-              <a:t>2026/4/22</a:t>
+              <a:t>2026/4/23</a:t>
             </a:fld>
             <a:endParaRPr lang="zh-TW" altLang="en-US"/>
           </a:p>
@@ -1823,7 +1823,7 @@
           <a:p>
             <a:fld id="{C6DC6E88-8268-41DF-AB70-3C6FB3488E03}" type="datetimeFigureOut">
               <a:rPr lang="zh-TW" altLang="en-US" smtClean="0"/>
-              <a:t>2026/4/22</a:t>
+              <a:t>2026/4/23</a:t>
             </a:fld>
             <a:endParaRPr lang="zh-TW" altLang="en-US"/>
           </a:p>
@@ -1964,7 +1964,7 @@
           <a:p>
             <a:fld id="{C6DC6E88-8268-41DF-AB70-3C6FB3488E03}" type="datetimeFigureOut">
               <a:rPr lang="zh-TW" altLang="en-US" smtClean="0"/>
-              <a:t>2026/4/22</a:t>
+              <a:t>2026/4/23</a:t>
             </a:fld>
             <a:endParaRPr lang="zh-TW" altLang="en-US"/>
           </a:p>
@@ -2077,7 +2077,7 @@
           <a:p>
             <a:fld id="{C6DC6E88-8268-41DF-AB70-3C6FB3488E03}" type="datetimeFigureOut">
               <a:rPr lang="zh-TW" altLang="en-US" smtClean="0"/>
-              <a:t>2026/4/22</a:t>
+              <a:t>2026/4/23</a:t>
             </a:fld>
             <a:endParaRPr lang="zh-TW" altLang="en-US"/>
           </a:p>
@@ -2388,7 +2388,7 @@
           <a:p>
             <a:fld id="{C6DC6E88-8268-41DF-AB70-3C6FB3488E03}" type="datetimeFigureOut">
               <a:rPr lang="zh-TW" altLang="en-US" smtClean="0"/>
-              <a:t>2026/4/22</a:t>
+              <a:t>2026/4/23</a:t>
             </a:fld>
             <a:endParaRPr lang="zh-TW" altLang="en-US"/>
           </a:p>
@@ -2676,7 +2676,7 @@
           <a:p>
             <a:fld id="{C6DC6E88-8268-41DF-AB70-3C6FB3488E03}" type="datetimeFigureOut">
               <a:rPr lang="zh-TW" altLang="en-US" smtClean="0"/>
-              <a:t>2026/4/22</a:t>
+              <a:t>2026/4/23</a:t>
             </a:fld>
             <a:endParaRPr lang="zh-TW" altLang="en-US"/>
           </a:p>
@@ -2917,7 +2917,7 @@
           <a:p>
             <a:fld id="{C6DC6E88-8268-41DF-AB70-3C6FB3488E03}" type="datetimeFigureOut">
               <a:rPr lang="zh-TW" altLang="en-US" smtClean="0"/>
-              <a:t>2026/4/22</a:t>
+              <a:t>2026/4/23</a:t>
             </a:fld>
             <a:endParaRPr lang="zh-TW" altLang="en-US"/>
           </a:p>
@@ -4353,14 +4353,14 @@
           <p:nvPr>
             <p:extLst>
               <p:ext uri="{D42A27DB-BD31-4B8C-83A1-F6EECF244321}">
-                <p14:modId xmlns:p14="http://schemas.microsoft.com/office/powerpoint/2010/main" val="2771321557"/>
+                <p14:modId xmlns:p14="http://schemas.microsoft.com/office/powerpoint/2010/main" val="2831968184"/>
               </p:ext>
             </p:extLst>
           </p:nvPr>
         </p:nvGraphicFramePr>
         <p:xfrm>
           <a:off x="1385957" y="530822"/>
-          <a:ext cx="8128000" cy="4521200"/>
+          <a:ext cx="8128000" cy="5262880"/>
         </p:xfrm>
         <a:graphic>
           <a:graphicData uri="http://schemas.openxmlformats.org/drawingml/2006/table">
@@ -5136,6 +5136,118 @@
                     <a:bodyPr/>
                     <a:lstStyle/>
                     <a:p>
+                      <a:pPr marL="0" marR="0" lvl="0" indent="0" algn="l" defTabSz="914400" rtl="0" eaLnBrk="1" fontAlgn="auto" latinLnBrk="0" hangingPunct="1">
+                        <a:lnSpc>
+                          <a:spcPct val="100000"/>
+                        </a:lnSpc>
+                        <a:spcBef>
+                          <a:spcPts val="0"/>
+                        </a:spcBef>
+                        <a:spcAft>
+                          <a:spcPts val="0"/>
+                        </a:spcAft>
+                        <a:buClrTx/>
+                        <a:buSzTx/>
+                        <a:buFontTx/>
+                        <a:buNone/>
+                        <a:tabLst/>
+                        <a:defRPr/>
+                      </a:pPr>
+                      <a:r>
+                        <a:rPr lang="en-US" altLang="zh-TW" sz="1400" dirty="0"/>
+                        <a:t>TEMP</a:t>
+                      </a:r>
+                      <a:r>
+                        <a:rPr lang="zh-TW" altLang="en-US" sz="1400" dirty="0"/>
+                        <a:t> </a:t>
+                      </a:r>
+                      <a:r>
+                        <a:rPr lang="en-US" altLang="zh-TW" sz="1400" dirty="0"/>
+                        <a:t>sensor ADC input</a:t>
+                      </a:r>
+                      <a:endParaRPr lang="zh-TW" altLang="en-US" sz="1400" dirty="0"/>
+                    </a:p>
+                  </a:txBody>
+                  <a:tcPr/>
+                </a:tc>
+                <a:tc>
+                  <a:txBody>
+                    <a:bodyPr/>
+                    <a:lstStyle/>
+                    <a:p>
+                      <a:r>
+                        <a:rPr lang="en-US" altLang="zh-TW" sz="1400" dirty="0">
+                          <a:highlight>
+                            <a:srgbClr val="FFFF00"/>
+                          </a:highlight>
+                        </a:rPr>
+                        <a:t>AIN1</a:t>
+                      </a:r>
+                      <a:endParaRPr lang="zh-TW" altLang="en-US" sz="1400" dirty="0">
+                        <a:highlight>
+                          <a:srgbClr val="FFFF00"/>
+                        </a:highlight>
+                      </a:endParaRPr>
+                    </a:p>
+                  </a:txBody>
+                  <a:tcPr/>
+                </a:tc>
+                <a:tc>
+                  <a:txBody>
+                    <a:bodyPr/>
+                    <a:lstStyle/>
+                    <a:p>
+                      <a:r>
+                        <a:rPr lang="en-US" altLang="zh-TW" sz="1400" dirty="0">
+                          <a:highlight>
+                            <a:srgbClr val="FFFF00"/>
+                          </a:highlight>
+                        </a:rPr>
+                        <a:t>AIN2</a:t>
+                      </a:r>
+                      <a:endParaRPr lang="zh-TW" altLang="en-US" sz="1400" dirty="0">
+                        <a:highlight>
+                          <a:srgbClr val="FFFF00"/>
+                        </a:highlight>
+                      </a:endParaRPr>
+                    </a:p>
+                  </a:txBody>
+                  <a:tcPr/>
+                </a:tc>
+                <a:tc>
+                  <a:txBody>
+                    <a:bodyPr/>
+                    <a:lstStyle/>
+                    <a:p>
+                      <a:r>
+                        <a:rPr lang="en-US" altLang="zh-TW" sz="1400" dirty="0">
+                          <a:highlight>
+                            <a:srgbClr val="FFFF00"/>
+                          </a:highlight>
+                        </a:rPr>
+                        <a:t>AIN3</a:t>
+                      </a:r>
+                      <a:endParaRPr lang="zh-TW" altLang="en-US" sz="1400" dirty="0">
+                        <a:highlight>
+                          <a:srgbClr val="FFFF00"/>
+                        </a:highlight>
+                      </a:endParaRPr>
+                    </a:p>
+                  </a:txBody>
+                  <a:tcPr/>
+                </a:tc>
+                <a:extLst>
+                  <a:ext uri="{0D108BD9-81ED-4DB2-BD59-A6C34878D82A}">
+                    <a16:rowId xmlns:a16="http://schemas.microsoft.com/office/drawing/2014/main" val="2258382984"/>
+                  </a:ext>
+                </a:extLst>
+              </a:tr>
+              <a:tr h="370840">
+                <a:tc>
+                  <a:txBody>
+                    <a:bodyPr/>
+                    <a:lstStyle/>
+                    <a:p>
                       <a:r>
                         <a:rPr lang="en-US" altLang="zh-TW" sz="1400" dirty="0"/>
                         <a:t>Mis-alignment </a:t>
@@ -5314,6 +5426,69 @@
                 <a:extLst>
                   <a:ext uri="{0D108BD9-81ED-4DB2-BD59-A6C34878D82A}">
                     <a16:rowId xmlns:a16="http://schemas.microsoft.com/office/drawing/2014/main" val="4057009047"/>
+                  </a:ext>
+                </a:extLst>
+              </a:tr>
+              <a:tr h="370840">
+                <a:tc>
+                  <a:txBody>
+                    <a:bodyPr/>
+                    <a:lstStyle/>
+                    <a:p>
+                      <a:r>
+                        <a:rPr lang="en-US" altLang="zh-TW" sz="1400" dirty="0"/>
+                        <a:t>NIOS2 index</a:t>
+                      </a:r>
+                      <a:endParaRPr lang="zh-TW" altLang="en-US" sz="1400" dirty="0"/>
+                    </a:p>
+                  </a:txBody>
+                  <a:tcPr/>
+                </a:tc>
+                <a:tc>
+                  <a:txBody>
+                    <a:bodyPr/>
+                    <a:lstStyle/>
+                    <a:p>
+                      <a:r>
+                        <a:rPr lang="en-US" altLang="zh-TW" sz="1400" dirty="0"/>
+                        <a:t>1</a:t>
+                      </a:r>
+                      <a:endParaRPr lang="zh-TW" altLang="en-US" sz="1400" dirty="0"/>
+                    </a:p>
+                  </a:txBody>
+                  <a:tcPr/>
+                </a:tc>
+                <a:tc>
+                  <a:txBody>
+                    <a:bodyPr/>
+                    <a:lstStyle/>
+                    <a:p>
+                      <a:r>
+                        <a:rPr lang="en-US" altLang="zh-TW" sz="1400"/>
+                        <a:t>3</a:t>
+                      </a:r>
+                      <a:endParaRPr lang="zh-TW" altLang="en-US" sz="1400" dirty="0"/>
+                    </a:p>
+                  </a:txBody>
+                  <a:tcPr/>
+                </a:tc>
+                <a:tc>
+                  <a:txBody>
+                    <a:bodyPr/>
+                    <a:lstStyle/>
+                    <a:p>
+                      <a:r>
+                        <a:rPr lang="en-US" altLang="zh-TW" sz="1400" dirty="0"/>
+                        <a:t>2</a:t>
+                      </a:r>
+                      <a:endParaRPr lang="zh-TW" altLang="en-US" sz="1400" dirty="0"/>
+                    </a:p>
+                  </a:txBody>
+                  <a:tcPr/>
+                </a:tc>
+                <a:extLst>
+                  <a:ext uri="{0D108BD9-81ED-4DB2-BD59-A6C34878D82A}">
+                    <a16:rowId xmlns:a16="http://schemas.microsoft.com/office/drawing/2014/main" val="2524139147"/>
                   </a:ext>
                 </a:extLst>
               </a:tr>
